--- a/ERP說明.pptx
+++ b/ERP說明.pptx
@@ -26,7 +26,7 @@
     <p:sldId id="268" r:id="rId14"/>
     <p:sldId id="269" r:id="rId15"/>
     <p:sldId id="270" r:id="rId16"/>
-    <p:sldId id="271" r:id="rId17"/>
+    <p:sldId id="277" r:id="rId17"/>
     <p:sldId id="272" r:id="rId18"/>
     <p:sldId id="273" r:id="rId19"/>
     <p:sldId id="274" r:id="rId20"/>
@@ -158,7 +158,7 @@
             <p14:sldId id="268"/>
             <p14:sldId id="269"/>
             <p14:sldId id="270"/>
-            <p14:sldId id="271"/>
+            <p14:sldId id="277"/>
             <p14:sldId id="272"/>
             <p14:sldId id="273"/>
             <p14:sldId id="274"/>
@@ -272,7 +272,7 @@
           <a:p>
             <a:fld id="{515C5D28-F0D0-4594-A27C-571BA3E96410}" type="datetimeFigureOut">
               <a:rPr lang="zh-TW" altLang="en-US" smtClean="0"/>
-              <a:t>2026/7/6</a:t>
+              <a:t>2026/7/16</a:t>
             </a:fld>
             <a:endParaRPr lang="zh-TW" altLang="en-US"/>
           </a:p>
@@ -449,7 +449,7 @@
           <a:p>
             <a:fld id="{8DC96113-7302-4536-B4C8-A01590DC9D4A}" type="datetimeFigureOut">
               <a:rPr lang="zh-TW" altLang="en-US" smtClean="0"/>
-              <a:t>2026/7/6</a:t>
+              <a:t>2026/7/16</a:t>
             </a:fld>
             <a:endParaRPr lang="zh-TW" altLang="en-US"/>
           </a:p>
@@ -964,39 +964,6 @@
       </p:sp>
       <p:sp>
         <p:nvSpPr>
-          <p:cNvPr id="17" name="Shape 2">
-            <a:extLst>
-              <a:ext uri="{FF2B5EF4-FFF2-40B4-BE49-F238E27FC236}">
-                <a16:creationId xmlns:a16="http://schemas.microsoft.com/office/drawing/2014/main" id="{C73A8D8C-1646-CDF9-1D28-092111247FF0}"/>
-              </a:ext>
-            </a:extLst>
-          </p:cNvPr>
-          <p:cNvSpPr/>
-          <p:nvPr userDrawn="1"/>
-        </p:nvSpPr>
-        <p:spPr>
-          <a:xfrm>
-            <a:off x="1005840" y="1143000"/>
-            <a:ext cx="822960" cy="822960"/>
-          </a:xfrm>
-          <a:prstGeom prst="ellipse">
-            <a:avLst/>
-          </a:prstGeom>
-          <a:solidFill>
-            <a:srgbClr val="065A82"/>
-          </a:solidFill>
-          <a:ln/>
-        </p:spPr>
-        <p:txBody>
-          <a:bodyPr/>
-          <a:lstStyle/>
-          <a:p>
-            <a:endParaRPr lang="zh-TW" altLang="en-US" dirty="0"/>
-          </a:p>
-        </p:txBody>
-      </p:sp>
-      <p:sp>
-        <p:nvSpPr>
           <p:cNvPr id="18" name="Text 3">
             <a:extLst>
               <a:ext uri="{FF2B5EF4-FFF2-40B4-BE49-F238E27FC236}">
@@ -1193,7 +1160,7 @@
             <a:avLst/>
           </a:prstGeom>
           <a:solidFill>
-            <a:srgbClr val="065A82"/>
+            <a:srgbClr val="D6E6EC"/>
           </a:solidFill>
           <a:ln/>
         </p:spPr>
@@ -1257,7 +1224,7 @@
             <a:avLst/>
           </a:prstGeom>
           <a:solidFill>
-            <a:srgbClr val="065A82"/>
+            <a:srgbClr val="D6E6EC"/>
           </a:solidFill>
           <a:ln/>
         </p:spPr>
@@ -1320,7 +1287,7 @@
             <a:avLst/>
           </a:prstGeom>
           <a:solidFill>
-            <a:srgbClr val="065A82"/>
+            <a:srgbClr val="D6E6EC"/>
           </a:solidFill>
           <a:ln/>
         </p:spPr>
@@ -1376,7 +1343,7 @@
             <a:avLst/>
           </a:prstGeom>
           <a:solidFill>
-            <a:srgbClr val="065A82"/>
+            <a:srgbClr val="D6E6EC"/>
           </a:solidFill>
           <a:ln/>
         </p:spPr>
@@ -1432,7 +1399,7 @@
             <a:avLst/>
           </a:prstGeom>
           <a:solidFill>
-            <a:srgbClr val="065A82"/>
+            <a:srgbClr val="D6E6EC"/>
           </a:solidFill>
           <a:ln/>
         </p:spPr>
@@ -2096,32 +2063,6 @@
           </a:p>
         </p:txBody>
       </p:sp>
-      <p:sp>
-        <p:nvSpPr>
-          <p:cNvPr id="12" name="Shape 0">
-            <a:extLst>
-              <a:ext uri="{FF2B5EF4-FFF2-40B4-BE49-F238E27FC236}">
-                <a16:creationId xmlns:a16="http://schemas.microsoft.com/office/drawing/2014/main" id="{FFA9774C-F6C4-15AE-410D-3416AC460770}"/>
-              </a:ext>
-            </a:extLst>
-          </p:cNvPr>
-          <p:cNvSpPr/>
-          <p:nvPr userDrawn="1"/>
-        </p:nvSpPr>
-        <p:spPr>
-          <a:xfrm>
-            <a:off x="585216" y="539496"/>
-            <a:ext cx="658368" cy="658368"/>
-          </a:xfrm>
-          <a:prstGeom prst="ellipse">
-            <a:avLst/>
-          </a:prstGeom>
-          <a:solidFill>
-            <a:srgbClr val="E6F1F5"/>
-          </a:solidFill>
-          <a:ln/>
-        </p:spPr>
-      </p:sp>
     </p:spTree>
     <p:extLst>
       <p:ext uri="{BB962C8B-B14F-4D97-AF65-F5344CB8AC3E}">
@@ -2440,32 +2381,6 @@
           </a:p>
         </p:txBody>
       </p:sp>
-      <p:sp>
-        <p:nvSpPr>
-          <p:cNvPr id="12" name="Shape 0">
-            <a:extLst>
-              <a:ext uri="{FF2B5EF4-FFF2-40B4-BE49-F238E27FC236}">
-                <a16:creationId xmlns:a16="http://schemas.microsoft.com/office/drawing/2014/main" id="{FFA9774C-F6C4-15AE-410D-3416AC460770}"/>
-              </a:ext>
-            </a:extLst>
-          </p:cNvPr>
-          <p:cNvSpPr/>
-          <p:nvPr userDrawn="1"/>
-        </p:nvSpPr>
-        <p:spPr>
-          <a:xfrm>
-            <a:off x="585216" y="539496"/>
-            <a:ext cx="658368" cy="658368"/>
-          </a:xfrm>
-          <a:prstGeom prst="ellipse">
-            <a:avLst/>
-          </a:prstGeom>
-          <a:solidFill>
-            <a:srgbClr val="E6F1F5"/>
-          </a:solidFill>
-          <a:ln/>
-        </p:spPr>
-      </p:sp>
     </p:spTree>
     <p:extLst>
       <p:ext uri="{BB962C8B-B14F-4D97-AF65-F5344CB8AC3E}">
@@ -2783,32 +2698,6 @@
             </a:endParaRPr>
           </a:p>
         </p:txBody>
-      </p:sp>
-      <p:sp>
-        <p:nvSpPr>
-          <p:cNvPr id="5" name="Shape 0">
-            <a:extLst>
-              <a:ext uri="{FF2B5EF4-FFF2-40B4-BE49-F238E27FC236}">
-                <a16:creationId xmlns:a16="http://schemas.microsoft.com/office/drawing/2014/main" id="{D70D0DDC-4F89-6149-23BF-ABA1536EEF9F}"/>
-              </a:ext>
-            </a:extLst>
-          </p:cNvPr>
-          <p:cNvSpPr/>
-          <p:nvPr userDrawn="1"/>
-        </p:nvSpPr>
-        <p:spPr>
-          <a:xfrm>
-            <a:off x="585216" y="539496"/>
-            <a:ext cx="658368" cy="658368"/>
-          </a:xfrm>
-          <a:prstGeom prst="ellipse">
-            <a:avLst/>
-          </a:prstGeom>
-          <a:solidFill>
-            <a:srgbClr val="FFFBEB"/>
-          </a:solidFill>
-          <a:ln/>
-        </p:spPr>
       </p:sp>
     </p:spTree>
     <p:extLst>
@@ -3169,7 +3058,7 @@
             <a:avLst/>
           </a:prstGeom>
           <a:solidFill>
-            <a:srgbClr val="065A82"/>
+            <a:srgbClr val="D6E6EC"/>
           </a:solidFill>
           <a:ln/>
         </p:spPr>
@@ -3233,7 +3122,7 @@
             <a:avLst/>
           </a:prstGeom>
           <a:solidFill>
-            <a:srgbClr val="065A82"/>
+            <a:srgbClr val="D6E6EC"/>
           </a:solidFill>
           <a:ln/>
         </p:spPr>
@@ -3296,7 +3185,7 @@
             <a:avLst/>
           </a:prstGeom>
           <a:solidFill>
-            <a:srgbClr val="065A82"/>
+            <a:srgbClr val="D6E6EC"/>
           </a:solidFill>
           <a:ln/>
         </p:spPr>
@@ -3352,7 +3241,7 @@
             <a:avLst/>
           </a:prstGeom>
           <a:solidFill>
-            <a:srgbClr val="065A82"/>
+            <a:srgbClr val="D6E6EC"/>
           </a:solidFill>
           <a:ln/>
         </p:spPr>
@@ -3408,7 +3297,7 @@
             <a:avLst/>
           </a:prstGeom>
           <a:solidFill>
-            <a:srgbClr val="065A82"/>
+            <a:srgbClr val="D6E6EC"/>
           </a:solidFill>
           <a:ln/>
         </p:spPr>
@@ -4040,7 +3929,7 @@
               <a:buNone/>
             </a:pPr>
             <a:r>
-              <a:rPr lang="en-US" sz="4400" b="1" dirty="0">
+              <a:rPr lang="en-US" sz="4400" b="1" dirty="0" err="1">
                 <a:solidFill>
                   <a:srgbClr val="FFFFFF"/>
                 </a:solidFill>
@@ -4048,7 +3937,7 @@
                 <a:ea typeface="微軟正黑體" panose="020B0604030504040204" pitchFamily="34" charset="-120"/>
                 <a:cs typeface="Cambria" pitchFamily="34" charset="-120"/>
               </a:rPr>
-              <a:t>簡易ERP系統 使用說明書</a:t>
+              <a:t>簡易ERP系統</a:t>
             </a:r>
             <a:endParaRPr lang="en-US" sz="4400" dirty="0">
               <a:latin typeface="微軟正黑體" panose="020B0604030504040204" pitchFamily="34" charset="-120"/>
@@ -4084,9 +3973,105 @@
           <a:bodyPr wrap="square" rtlCol="0" anchor="ctr"/>
           <a:lstStyle/>
           <a:p>
-            <a:pPr marL="0" indent="0">
-              <a:buNone/>
-            </a:pPr>
+            <a:r>
+              <a:rPr lang="zh-TW" altLang="en-US" sz="2000" dirty="0">
+                <a:solidFill>
+                  <a:srgbClr val="C7DCE6"/>
+                </a:solidFill>
+                <a:latin typeface="微軟正黑體" panose="020B0604030504040204" pitchFamily="34" charset="-120"/>
+                <a:ea typeface="微軟正黑體" panose="020B0604030504040204" pitchFamily="34" charset="-120"/>
+                <a:cs typeface="Calibri" pitchFamily="34" charset="-120"/>
+              </a:rPr>
+              <a:t>使用說明書 </a:t>
+            </a:r>
+            <a:r>
+              <a:rPr lang="en-US" altLang="zh-TW" sz="2000" dirty="0">
+                <a:solidFill>
+                  <a:srgbClr val="C7DCE6"/>
+                </a:solidFill>
+                <a:latin typeface="微軟正黑體" panose="020B0604030504040204" pitchFamily="34" charset="-120"/>
+                <a:ea typeface="微軟正黑體" panose="020B0604030504040204" pitchFamily="34" charset="-120"/>
+                <a:cs typeface="Calibri" pitchFamily="34" charset="-120"/>
+              </a:rPr>
+              <a:t>·</a:t>
+            </a:r>
+            <a:r>
+              <a:rPr lang="zh-TW" altLang="en-US" sz="2000" dirty="0">
+                <a:solidFill>
+                  <a:srgbClr val="C7DCE6"/>
+                </a:solidFill>
+                <a:latin typeface="微軟正黑體" panose="020B0604030504040204" pitchFamily="34" charset="-120"/>
+                <a:ea typeface="微軟正黑體" panose="020B0604030504040204" pitchFamily="34" charset="-120"/>
+                <a:cs typeface="Calibri" pitchFamily="34" charset="-120"/>
+              </a:rPr>
+              <a:t> </a:t>
+            </a:r>
+            <a:r>
+              <a:rPr lang="en-US" sz="2000" dirty="0" err="1">
+                <a:solidFill>
+                  <a:srgbClr val="C7DCE6"/>
+                </a:solidFill>
+                <a:latin typeface="微軟正黑體" panose="020B0604030504040204" pitchFamily="34" charset="-120"/>
+                <a:ea typeface="微軟正黑體" panose="020B0604030504040204" pitchFamily="34" charset="-120"/>
+                <a:cs typeface="Calibri" pitchFamily="34" charset="-120"/>
+              </a:rPr>
+              <a:t>開發者建置手冊</a:t>
+            </a:r>
+            <a:r>
+              <a:rPr lang="zh-TW" altLang="en-US" sz="2000" dirty="0">
+                <a:solidFill>
+                  <a:srgbClr val="C7DCE6"/>
+                </a:solidFill>
+                <a:latin typeface="微軟正黑體" panose="020B0604030504040204" pitchFamily="34" charset="-120"/>
+                <a:ea typeface="微軟正黑體" panose="020B0604030504040204" pitchFamily="34" charset="-120"/>
+                <a:cs typeface="Calibri" pitchFamily="34" charset="-120"/>
+              </a:rPr>
+              <a:t> </a:t>
+            </a:r>
+            <a:r>
+              <a:rPr lang="en-US" altLang="zh-TW" sz="2000" dirty="0">
+                <a:solidFill>
+                  <a:srgbClr val="C7DCE6"/>
+                </a:solidFill>
+                <a:latin typeface="微軟正黑體" panose="020B0604030504040204" pitchFamily="34" charset="-120"/>
+                <a:ea typeface="微軟正黑體" panose="020B0604030504040204" pitchFamily="34" charset="-120"/>
+                <a:cs typeface="Calibri" pitchFamily="34" charset="-120"/>
+              </a:rPr>
+              <a:t>·</a:t>
+            </a:r>
+            <a:r>
+              <a:rPr lang="zh-TW" altLang="en-US" sz="2000" dirty="0">
+                <a:solidFill>
+                  <a:srgbClr val="C7DCE6"/>
+                </a:solidFill>
+                <a:latin typeface="微軟正黑體" panose="020B0604030504040204" pitchFamily="34" charset="-120"/>
+                <a:ea typeface="微軟正黑體" panose="020B0604030504040204" pitchFamily="34" charset="-120"/>
+                <a:cs typeface="Calibri" pitchFamily="34" charset="-120"/>
+              </a:rPr>
+              <a:t> </a:t>
+            </a:r>
+            <a:r>
+              <a:rPr lang="en-US" altLang="zh-TW" sz="2000" dirty="0" err="1">
+                <a:solidFill>
+                  <a:srgbClr val="C7DCE6"/>
+                </a:solidFill>
+                <a:latin typeface="微軟正黑體" panose="020B0604030504040204" pitchFamily="34" charset="-120"/>
+                <a:ea typeface="微軟正黑體" panose="020B0604030504040204" pitchFamily="34" charset="-120"/>
+                <a:cs typeface="Calibri" pitchFamily="34" charset="-120"/>
+              </a:rPr>
+              <a:t>客戶操作指南</a:t>
+            </a:r>
+            <a:r>
+              <a:rPr lang="en-US" altLang="zh-TW" sz="2000" dirty="0">
+                <a:solidFill>
+                  <a:srgbClr val="C7DCE6"/>
+                </a:solidFill>
+                <a:latin typeface="微軟正黑體" panose="020B0604030504040204" pitchFamily="34" charset="-120"/>
+                <a:ea typeface="微軟正黑體" panose="020B0604030504040204" pitchFamily="34" charset="-120"/>
+                <a:cs typeface="Calibri" pitchFamily="34" charset="-120"/>
+              </a:rPr>
+              <a:t> </a:t>
+            </a:r>
             <a:r>
               <a:rPr lang="en-US" sz="2000" dirty="0">
                 <a:solidFill>
@@ -4096,7 +4081,7 @@
                 <a:ea typeface="微軟正黑體" panose="020B0604030504040204" pitchFamily="34" charset="-120"/>
                 <a:cs typeface="Calibri" pitchFamily="34" charset="-120"/>
               </a:rPr>
-              <a:t>開發者建置手冊　與　客戶操作指南</a:t>
+              <a:t>　</a:t>
             </a:r>
             <a:endParaRPr lang="en-US" sz="2000" dirty="0">
               <a:latin typeface="微軟正黑體" panose="020B0604030504040204" pitchFamily="34" charset="-120"/>
@@ -4255,94 +4240,6 @@
       </p:sp>
       <p:sp>
         <p:nvSpPr>
-          <p:cNvPr id="3" name="Text 1">
-            <a:extLst>
-              <a:ext uri="{FF2B5EF4-FFF2-40B4-BE49-F238E27FC236}">
-                <a16:creationId xmlns:a16="http://schemas.microsoft.com/office/drawing/2014/main" id="{77007427-7A5C-4263-2712-D293313173DC}"/>
-              </a:ext>
-            </a:extLst>
-          </p:cNvPr>
-          <p:cNvSpPr/>
-          <p:nvPr/>
-        </p:nvSpPr>
-        <p:spPr>
-          <a:xfrm>
-            <a:off x="1432408" y="438912"/>
-            <a:ext cx="9144000" cy="320040"/>
-          </a:xfrm>
-          <a:prstGeom prst="rect">
-            <a:avLst/>
-          </a:prstGeom>
-          <a:noFill/>
-          <a:ln/>
-        </p:spPr>
-        <p:txBody>
-          <a:bodyPr wrap="square" rtlCol="0" anchor="ctr"/>
-          <a:lstStyle/>
-          <a:p>
-            <a:pPr marL="0" indent="0">
-              <a:buNone/>
-            </a:pPr>
-            <a:r>
-              <a:rPr lang="en-US" sz="1300" b="1" kern="0" spc="100" dirty="0">
-                <a:solidFill>
-                  <a:srgbClr val="1C7293"/>
-                </a:solidFill>
-                <a:latin typeface="微軟正黑體" panose="020B0604030504040204" pitchFamily="34" charset="-120"/>
-                <a:ea typeface="微軟正黑體" panose="020B0604030504040204" pitchFamily="34" charset="-120"/>
-                <a:cs typeface="Calibri" pitchFamily="34" charset="-120"/>
-              </a:rPr>
-              <a:t>PAYMENT</a:t>
-            </a:r>
-          </a:p>
-        </p:txBody>
-      </p:sp>
-      <p:sp>
-        <p:nvSpPr>
-          <p:cNvPr id="4" name="Text 2">
-            <a:extLst>
-              <a:ext uri="{FF2B5EF4-FFF2-40B4-BE49-F238E27FC236}">
-                <a16:creationId xmlns:a16="http://schemas.microsoft.com/office/drawing/2014/main" id="{908A337E-B160-C13E-B98C-CD3BF18B586F}"/>
-              </a:ext>
-            </a:extLst>
-          </p:cNvPr>
-          <p:cNvSpPr/>
-          <p:nvPr/>
-        </p:nvSpPr>
-        <p:spPr>
-          <a:xfrm>
-            <a:off x="1432408" y="722376"/>
-            <a:ext cx="9601200" cy="548640"/>
-          </a:xfrm>
-          <a:prstGeom prst="rect">
-            <a:avLst/>
-          </a:prstGeom>
-          <a:noFill/>
-          <a:ln/>
-        </p:spPr>
-        <p:txBody>
-          <a:bodyPr wrap="square" rtlCol="0" anchor="ctr"/>
-          <a:lstStyle/>
-          <a:p>
-            <a:pPr marL="0" indent="0">
-              <a:buNone/>
-            </a:pPr>
-            <a:r>
-              <a:rPr lang="zh-TW" altLang="en-US" sz="2800" b="1" dirty="0">
-                <a:solidFill>
-                  <a:srgbClr val="1E293B"/>
-                </a:solidFill>
-                <a:latin typeface="微軟正黑體" panose="020B0604030504040204" pitchFamily="34" charset="-120"/>
-                <a:ea typeface="微軟正黑體" panose="020B0604030504040204" pitchFamily="34" charset="-120"/>
-                <a:cs typeface="Cambria" pitchFamily="34" charset="-120"/>
-              </a:rPr>
-              <a:t>應付款項／應收款項</a:t>
-            </a:r>
-          </a:p>
-        </p:txBody>
-      </p:sp>
-      <p:sp>
-        <p:nvSpPr>
           <p:cNvPr id="5" name="Text 3">
             <a:extLst>
               <a:ext uri="{FF2B5EF4-FFF2-40B4-BE49-F238E27FC236}">
@@ -4491,36 +4388,6 @@
           </a:p>
         </p:txBody>
       </p:sp>
-      <p:pic>
-        <p:nvPicPr>
-          <p:cNvPr id="8" name="Image 3" descr="preencoded.png">
-            <a:extLst>
-              <a:ext uri="{FF2B5EF4-FFF2-40B4-BE49-F238E27FC236}">
-                <a16:creationId xmlns:a16="http://schemas.microsoft.com/office/drawing/2014/main" id="{902D42DA-6CEF-74C4-D364-16EF2A63DF72}"/>
-              </a:ext>
-            </a:extLst>
-          </p:cNvPr>
-          <p:cNvPicPr>
-            <a:picLocks noChangeAspect="1"/>
-          </p:cNvPicPr>
-          <p:nvPr/>
-        </p:nvPicPr>
-        <p:blipFill>
-          <a:blip r:embed="rId2"/>
-          <a:stretch>
-            <a:fillRect/>
-          </a:stretch>
-        </p:blipFill>
-        <p:spPr>
-          <a:xfrm>
-            <a:off x="753054" y="697008"/>
-            <a:ext cx="329184" cy="329184"/>
-          </a:xfrm>
-          <a:prstGeom prst="rect">
-            <a:avLst/>
-          </a:prstGeom>
-        </p:spPr>
-      </p:pic>
       <p:sp>
         <p:nvSpPr>
           <p:cNvPr id="9" name="Text 4">
@@ -5174,6 +5041,88 @@
               <a:latin typeface="微軟正黑體" panose="020B0604030504040204" pitchFamily="34" charset="-120"/>
               <a:ea typeface="微軟正黑體" panose="020B0604030504040204" pitchFamily="34" charset="-120"/>
             </a:endParaRPr>
+          </a:p>
+        </p:txBody>
+      </p:sp>
+      <p:sp>
+        <p:nvSpPr>
+          <p:cNvPr id="17" name="Text 1">
+            <a:extLst>
+              <a:ext uri="{FF2B5EF4-FFF2-40B4-BE49-F238E27FC236}">
+                <a16:creationId xmlns:a16="http://schemas.microsoft.com/office/drawing/2014/main" id="{58C2841E-4FCC-2BB5-D3FD-7D17BA5971C7}"/>
+              </a:ext>
+            </a:extLst>
+          </p:cNvPr>
+          <p:cNvSpPr/>
+          <p:nvPr/>
+        </p:nvSpPr>
+        <p:spPr>
+          <a:xfrm>
+            <a:off x="792328" y="515112"/>
+            <a:ext cx="9784080" cy="320040"/>
+          </a:xfrm>
+          <a:prstGeom prst="rect">
+            <a:avLst/>
+          </a:prstGeom>
+          <a:noFill/>
+          <a:ln/>
+        </p:spPr>
+        <p:txBody>
+          <a:bodyPr wrap="square" rtlCol="0" anchor="ctr"/>
+          <a:lstStyle/>
+          <a:p>
+            <a:r>
+              <a:rPr lang="en-US" altLang="zh-TW" sz="1200" b="1" kern="0" spc="100" dirty="0">
+                <a:solidFill>
+                  <a:srgbClr val="1C7293"/>
+                </a:solidFill>
+                <a:latin typeface="微軟正黑體" panose="020B0604030504040204" pitchFamily="34" charset="-120"/>
+                <a:ea typeface="微軟正黑體" panose="020B0604030504040204" pitchFamily="34" charset="-120"/>
+                <a:cs typeface="Calibri" pitchFamily="34" charset="-120"/>
+              </a:rPr>
+              <a:t>PAYMENT</a:t>
+            </a:r>
+          </a:p>
+        </p:txBody>
+      </p:sp>
+      <p:sp>
+        <p:nvSpPr>
+          <p:cNvPr id="19" name="Text 2">
+            <a:extLst>
+              <a:ext uri="{FF2B5EF4-FFF2-40B4-BE49-F238E27FC236}">
+                <a16:creationId xmlns:a16="http://schemas.microsoft.com/office/drawing/2014/main" id="{E488D702-AB4E-459F-7FEF-8F5A41396964}"/>
+              </a:ext>
+            </a:extLst>
+          </p:cNvPr>
+          <p:cNvSpPr/>
+          <p:nvPr/>
+        </p:nvSpPr>
+        <p:spPr>
+          <a:xfrm>
+            <a:off x="792328" y="823976"/>
+            <a:ext cx="10241280" cy="548640"/>
+          </a:xfrm>
+          <a:prstGeom prst="rect">
+            <a:avLst/>
+          </a:prstGeom>
+          <a:noFill/>
+          <a:ln/>
+        </p:spPr>
+        <p:txBody>
+          <a:bodyPr wrap="square" rtlCol="0" anchor="ctr"/>
+          <a:lstStyle/>
+          <a:p>
+            <a:r>
+              <a:rPr lang="zh-TW" altLang="en-US" sz="2800" b="1" dirty="0">
+                <a:solidFill>
+                  <a:srgbClr val="1E293B"/>
+                </a:solidFill>
+                <a:latin typeface="微軟正黑體" panose="020B0604030504040204" pitchFamily="34" charset="-120"/>
+                <a:ea typeface="微軟正黑體" panose="020B0604030504040204" pitchFamily="34" charset="-120"/>
+                <a:cs typeface="Cambria" pitchFamily="34" charset="-120"/>
+              </a:rPr>
+              <a:t>應付款項／應收款項</a:t>
+            </a:r>
           </a:p>
         </p:txBody>
       </p:sp>
@@ -5239,124 +5188,6 @@
       </p:sp>
       <p:sp>
         <p:nvSpPr>
-          <p:cNvPr id="3" name="Text 1">
-            <a:extLst>
-              <a:ext uri="{FF2B5EF4-FFF2-40B4-BE49-F238E27FC236}">
-                <a16:creationId xmlns:a16="http://schemas.microsoft.com/office/drawing/2014/main" id="{D06F8AC0-2F19-F7CC-0F01-57D9A921FDEF}"/>
-              </a:ext>
-            </a:extLst>
-          </p:cNvPr>
-          <p:cNvSpPr/>
-          <p:nvPr/>
-        </p:nvSpPr>
-        <p:spPr>
-          <a:xfrm>
-            <a:off x="1432408" y="438912"/>
-            <a:ext cx="9144000" cy="320040"/>
-          </a:xfrm>
-          <a:prstGeom prst="rect">
-            <a:avLst/>
-          </a:prstGeom>
-          <a:noFill/>
-          <a:ln/>
-        </p:spPr>
-        <p:txBody>
-          <a:bodyPr wrap="square" rtlCol="0" anchor="ctr"/>
-          <a:lstStyle/>
-          <a:p>
-            <a:pPr marL="0" indent="0">
-              <a:buNone/>
-            </a:pPr>
-            <a:r>
-              <a:rPr lang="en-US" sz="1300" b="1" kern="0" spc="100" dirty="0">
-                <a:solidFill>
-                  <a:srgbClr val="1C7293"/>
-                </a:solidFill>
-                <a:latin typeface="微軟正黑體" panose="020B0604030504040204" pitchFamily="34" charset="-120"/>
-                <a:ea typeface="微軟正黑體" panose="020B0604030504040204" pitchFamily="34" charset="-120"/>
-                <a:cs typeface="Calibri" pitchFamily="34" charset="-120"/>
-              </a:rPr>
-              <a:t>SUMMARIZ</a:t>
-            </a:r>
-          </a:p>
-        </p:txBody>
-      </p:sp>
-      <p:sp>
-        <p:nvSpPr>
-          <p:cNvPr id="4" name="Text 2">
-            <a:extLst>
-              <a:ext uri="{FF2B5EF4-FFF2-40B4-BE49-F238E27FC236}">
-                <a16:creationId xmlns:a16="http://schemas.microsoft.com/office/drawing/2014/main" id="{27D63C9E-151C-D427-8A2D-9DCE5B5C550A}"/>
-              </a:ext>
-            </a:extLst>
-          </p:cNvPr>
-          <p:cNvSpPr/>
-          <p:nvPr/>
-        </p:nvSpPr>
-        <p:spPr>
-          <a:xfrm>
-            <a:off x="1432408" y="722376"/>
-            <a:ext cx="9601200" cy="548640"/>
-          </a:xfrm>
-          <a:prstGeom prst="rect">
-            <a:avLst/>
-          </a:prstGeom>
-          <a:noFill/>
-          <a:ln/>
-        </p:spPr>
-        <p:txBody>
-          <a:bodyPr wrap="square" rtlCol="0" anchor="ctr"/>
-          <a:lstStyle/>
-          <a:p>
-            <a:pPr marL="0" indent="0">
-              <a:buNone/>
-            </a:pPr>
-            <a:r>
-              <a:rPr lang="zh-TW" altLang="en-US" sz="2800" b="1" dirty="0">
-                <a:solidFill>
-                  <a:srgbClr val="1E293B"/>
-                </a:solidFill>
-                <a:latin typeface="微軟正黑體" panose="020B0604030504040204" pitchFamily="34" charset="-120"/>
-                <a:ea typeface="微軟正黑體" panose="020B0604030504040204" pitchFamily="34" charset="-120"/>
-                <a:cs typeface="Cambria" pitchFamily="34" charset="-120"/>
-              </a:rPr>
-              <a:t>開發者篇｜部署前檢查清單</a:t>
-            </a:r>
-          </a:p>
-        </p:txBody>
-      </p:sp>
-      <p:pic>
-        <p:nvPicPr>
-          <p:cNvPr id="5" name="Image 0" descr="preencoded.png">
-            <a:extLst>
-              <a:ext uri="{FF2B5EF4-FFF2-40B4-BE49-F238E27FC236}">
-                <a16:creationId xmlns:a16="http://schemas.microsoft.com/office/drawing/2014/main" id="{9D73DEF8-6B6A-91A9-FF9B-41A2EF7CEB34}"/>
-              </a:ext>
-            </a:extLst>
-          </p:cNvPr>
-          <p:cNvPicPr>
-            <a:picLocks noChangeAspect="1"/>
-          </p:cNvPicPr>
-          <p:nvPr/>
-        </p:nvPicPr>
-        <p:blipFill>
-          <a:blip r:embed="rId2"/>
-          <a:stretch>
-            <a:fillRect/>
-          </a:stretch>
-        </p:blipFill>
-        <p:spPr>
-          <a:xfrm>
-            <a:off x="688066" y="613680"/>
-            <a:ext cx="455578" cy="455578"/>
-          </a:xfrm>
-          <a:prstGeom prst="rect">
-            <a:avLst/>
-          </a:prstGeom>
-        </p:spPr>
-      </p:pic>
-      <p:sp>
-        <p:nvSpPr>
           <p:cNvPr id="6" name="Shape 4">
             <a:extLst>
               <a:ext uri="{FF2B5EF4-FFF2-40B4-BE49-F238E27FC236}">
@@ -6165,6 +5996,88 @@
               <a:latin typeface="微軟正黑體" panose="020B0604030504040204" pitchFamily="34" charset="-120"/>
               <a:ea typeface="微軟正黑體" panose="020B0604030504040204" pitchFamily="34" charset="-120"/>
             </a:endParaRPr>
+          </a:p>
+        </p:txBody>
+      </p:sp>
+      <p:sp>
+        <p:nvSpPr>
+          <p:cNvPr id="21" name="Text 1">
+            <a:extLst>
+              <a:ext uri="{FF2B5EF4-FFF2-40B4-BE49-F238E27FC236}">
+                <a16:creationId xmlns:a16="http://schemas.microsoft.com/office/drawing/2014/main" id="{F96AE9A1-3F1C-90D0-4F5D-150041E55A5D}"/>
+              </a:ext>
+            </a:extLst>
+          </p:cNvPr>
+          <p:cNvSpPr/>
+          <p:nvPr/>
+        </p:nvSpPr>
+        <p:spPr>
+          <a:xfrm>
+            <a:off x="792328" y="515112"/>
+            <a:ext cx="9784080" cy="320040"/>
+          </a:xfrm>
+          <a:prstGeom prst="rect">
+            <a:avLst/>
+          </a:prstGeom>
+          <a:noFill/>
+          <a:ln/>
+        </p:spPr>
+        <p:txBody>
+          <a:bodyPr wrap="square" rtlCol="0" anchor="ctr"/>
+          <a:lstStyle/>
+          <a:p>
+            <a:r>
+              <a:rPr lang="en-US" altLang="zh-TW" sz="1200" b="1" kern="0" spc="100" dirty="0">
+                <a:solidFill>
+                  <a:srgbClr val="1C7293"/>
+                </a:solidFill>
+                <a:latin typeface="微軟正黑體" panose="020B0604030504040204" pitchFamily="34" charset="-120"/>
+                <a:ea typeface="微軟正黑體" panose="020B0604030504040204" pitchFamily="34" charset="-120"/>
+                <a:cs typeface="Calibri" pitchFamily="34" charset="-120"/>
+              </a:rPr>
+              <a:t>SUMMARIZ</a:t>
+            </a:r>
+          </a:p>
+        </p:txBody>
+      </p:sp>
+      <p:sp>
+        <p:nvSpPr>
+          <p:cNvPr id="23" name="Text 2">
+            <a:extLst>
+              <a:ext uri="{FF2B5EF4-FFF2-40B4-BE49-F238E27FC236}">
+                <a16:creationId xmlns:a16="http://schemas.microsoft.com/office/drawing/2014/main" id="{D0619A6F-CCB4-95D1-1900-F9EA6F49FF94}"/>
+              </a:ext>
+            </a:extLst>
+          </p:cNvPr>
+          <p:cNvSpPr/>
+          <p:nvPr/>
+        </p:nvSpPr>
+        <p:spPr>
+          <a:xfrm>
+            <a:off x="792328" y="823976"/>
+            <a:ext cx="10241280" cy="548640"/>
+          </a:xfrm>
+          <a:prstGeom prst="rect">
+            <a:avLst/>
+          </a:prstGeom>
+          <a:noFill/>
+          <a:ln/>
+        </p:spPr>
+        <p:txBody>
+          <a:bodyPr wrap="square" rtlCol="0" anchor="ctr"/>
+          <a:lstStyle/>
+          <a:p>
+            <a:r>
+              <a:rPr lang="zh-TW" altLang="en-US" sz="2800" b="1" dirty="0">
+                <a:solidFill>
+                  <a:srgbClr val="1E293B"/>
+                </a:solidFill>
+                <a:latin typeface="微軟正黑體" panose="020B0604030504040204" pitchFamily="34" charset="-120"/>
+                <a:ea typeface="微軟正黑體" panose="020B0604030504040204" pitchFamily="34" charset="-120"/>
+                <a:cs typeface="Cambria" pitchFamily="34" charset="-120"/>
+              </a:rPr>
+              <a:t>開發者篇｜部署前檢查清單</a:t>
+            </a:r>
           </a:p>
         </p:txBody>
       </p:sp>
@@ -6270,7 +6183,18 @@
                 <a:ea typeface="微軟正黑體" panose="020B0604030504040204" pitchFamily="34" charset="-120"/>
                 <a:cs typeface="Calibri" pitchFamily="34" charset="-120"/>
               </a:rPr>
-              <a:t>PART 1</a:t>
+              <a:t>PART </a:t>
+            </a:r>
+            <a:r>
+              <a:rPr lang="en-US" altLang="zh-TW" sz="1500" b="1" kern="0" spc="200" dirty="0">
+                <a:solidFill>
+                  <a:srgbClr val="8FC1D9"/>
+                </a:solidFill>
+                <a:latin typeface="微軟正黑體" panose="020B0604030504040204" pitchFamily="34" charset="-120"/>
+                <a:ea typeface="微軟正黑體" panose="020B0604030504040204" pitchFamily="34" charset="-120"/>
+                <a:cs typeface="Calibri" pitchFamily="34" charset="-120"/>
+              </a:rPr>
+              <a:t>2</a:t>
             </a:r>
             <a:endParaRPr lang="en-US" sz="1500" dirty="0">
               <a:latin typeface="微軟正黑體" panose="020B0604030504040204" pitchFamily="34" charset="-120"/>
@@ -6462,94 +6386,6 @@
       </p:sp>
       <p:sp>
         <p:nvSpPr>
-          <p:cNvPr id="3" name="Text 1">
-            <a:extLst>
-              <a:ext uri="{FF2B5EF4-FFF2-40B4-BE49-F238E27FC236}">
-                <a16:creationId xmlns:a16="http://schemas.microsoft.com/office/drawing/2014/main" id="{A1E84375-31A6-295B-89A5-96EE267A43A8}"/>
-              </a:ext>
-            </a:extLst>
-          </p:cNvPr>
-          <p:cNvSpPr/>
-          <p:nvPr/>
-        </p:nvSpPr>
-        <p:spPr>
-          <a:xfrm>
-            <a:off x="1432408" y="438912"/>
-            <a:ext cx="9144000" cy="320040"/>
-          </a:xfrm>
-          <a:prstGeom prst="rect">
-            <a:avLst/>
-          </a:prstGeom>
-          <a:noFill/>
-          <a:ln/>
-        </p:spPr>
-        <p:txBody>
-          <a:bodyPr wrap="square" rtlCol="0" anchor="ctr"/>
-          <a:lstStyle/>
-          <a:p>
-            <a:pPr marL="0" indent="0">
-              <a:buNone/>
-            </a:pPr>
-            <a:r>
-              <a:rPr lang="en-US" sz="1300" b="1" kern="0" spc="100" dirty="0">
-                <a:solidFill>
-                  <a:srgbClr val="CC6600"/>
-                </a:solidFill>
-                <a:latin typeface="微軟正黑體" panose="020B0604030504040204" pitchFamily="34" charset="-120"/>
-                <a:ea typeface="微軟正黑體" panose="020B0604030504040204" pitchFamily="34" charset="-120"/>
-                <a:cs typeface="Calibri" pitchFamily="34" charset="-120"/>
-              </a:rPr>
-              <a:t>PRODUCT</a:t>
-            </a:r>
-          </a:p>
-        </p:txBody>
-      </p:sp>
-      <p:sp>
-        <p:nvSpPr>
-          <p:cNvPr id="4" name="Text 2">
-            <a:extLst>
-              <a:ext uri="{FF2B5EF4-FFF2-40B4-BE49-F238E27FC236}">
-                <a16:creationId xmlns:a16="http://schemas.microsoft.com/office/drawing/2014/main" id="{CE0CD3E7-D601-9A9D-A53B-1CE068CF6475}"/>
-              </a:ext>
-            </a:extLst>
-          </p:cNvPr>
-          <p:cNvSpPr/>
-          <p:nvPr/>
-        </p:nvSpPr>
-        <p:spPr>
-          <a:xfrm>
-            <a:off x="1432408" y="722376"/>
-            <a:ext cx="9601200" cy="548640"/>
-          </a:xfrm>
-          <a:prstGeom prst="rect">
-            <a:avLst/>
-          </a:prstGeom>
-          <a:noFill/>
-          <a:ln/>
-        </p:spPr>
-        <p:txBody>
-          <a:bodyPr wrap="square" rtlCol="0" anchor="ctr"/>
-          <a:lstStyle/>
-          <a:p>
-            <a:pPr marL="0" indent="0">
-              <a:buNone/>
-            </a:pPr>
-            <a:r>
-              <a:rPr lang="zh-TW" altLang="en-US" sz="2800" b="1" dirty="0">
-                <a:solidFill>
-                  <a:srgbClr val="1E293B"/>
-                </a:solidFill>
-                <a:latin typeface="微軟正黑體" panose="020B0604030504040204" pitchFamily="34" charset="-120"/>
-                <a:ea typeface="微軟正黑體" panose="020B0604030504040204" pitchFamily="34" charset="-120"/>
-                <a:cs typeface="Cambria" pitchFamily="34" charset="-120"/>
-              </a:rPr>
-              <a:t>新增商品</a:t>
-            </a:r>
-          </a:p>
-        </p:txBody>
-      </p:sp>
-      <p:sp>
-        <p:nvSpPr>
           <p:cNvPr id="23" name="Shape 3">
             <a:extLst>
               <a:ext uri="{FF2B5EF4-FFF2-40B4-BE49-F238E27FC236}">
@@ -7345,36 +7181,88 @@
           </a:p>
         </p:txBody>
       </p:sp>
-      <p:pic>
-        <p:nvPicPr>
-          <p:cNvPr id="38" name="Image 0" descr="preencoded.png">
-            <a:extLst>
-              <a:ext uri="{FF2B5EF4-FFF2-40B4-BE49-F238E27FC236}">
-                <a16:creationId xmlns:a16="http://schemas.microsoft.com/office/drawing/2014/main" id="{00547D6C-BECE-6ED9-E21E-7EF125833D35}"/>
-              </a:ext>
-            </a:extLst>
-          </p:cNvPr>
-          <p:cNvPicPr>
-            <a:picLocks noChangeAspect="1"/>
-          </p:cNvPicPr>
-          <p:nvPr/>
-        </p:nvPicPr>
-        <p:blipFill>
-          <a:blip r:embed="rId2"/>
-          <a:stretch>
-            <a:fillRect/>
-          </a:stretch>
-        </p:blipFill>
-        <p:spPr>
-          <a:xfrm>
-            <a:off x="771190" y="725635"/>
-            <a:ext cx="293967" cy="293967"/>
-          </a:xfrm>
-          <a:prstGeom prst="rect">
-            <a:avLst/>
-          </a:prstGeom>
-        </p:spPr>
-      </p:pic>
+      <p:sp>
+        <p:nvSpPr>
+          <p:cNvPr id="6" name="Text 1">
+            <a:extLst>
+              <a:ext uri="{FF2B5EF4-FFF2-40B4-BE49-F238E27FC236}">
+                <a16:creationId xmlns:a16="http://schemas.microsoft.com/office/drawing/2014/main" id="{21B40012-D55C-536D-B376-710EF6336761}"/>
+              </a:ext>
+            </a:extLst>
+          </p:cNvPr>
+          <p:cNvSpPr/>
+          <p:nvPr/>
+        </p:nvSpPr>
+        <p:spPr>
+          <a:xfrm>
+            <a:off x="792328" y="515112"/>
+            <a:ext cx="9784080" cy="320040"/>
+          </a:xfrm>
+          <a:prstGeom prst="rect">
+            <a:avLst/>
+          </a:prstGeom>
+          <a:noFill/>
+          <a:ln/>
+        </p:spPr>
+        <p:txBody>
+          <a:bodyPr wrap="square" rtlCol="0" anchor="ctr"/>
+          <a:lstStyle/>
+          <a:p>
+            <a:r>
+              <a:rPr lang="en-US" altLang="zh-TW" sz="1200" b="1" kern="0" spc="100" dirty="0">
+                <a:solidFill>
+                  <a:srgbClr val="CC6600"/>
+                </a:solidFill>
+                <a:latin typeface="微軟正黑體" panose="020B0604030504040204" pitchFamily="34" charset="-120"/>
+                <a:ea typeface="微軟正黑體" panose="020B0604030504040204" pitchFamily="34" charset="-120"/>
+                <a:cs typeface="Calibri" pitchFamily="34" charset="-120"/>
+              </a:rPr>
+              <a:t>PRODUCT</a:t>
+            </a:r>
+          </a:p>
+        </p:txBody>
+      </p:sp>
+      <p:sp>
+        <p:nvSpPr>
+          <p:cNvPr id="8" name="Text 2">
+            <a:extLst>
+              <a:ext uri="{FF2B5EF4-FFF2-40B4-BE49-F238E27FC236}">
+                <a16:creationId xmlns:a16="http://schemas.microsoft.com/office/drawing/2014/main" id="{A1ECD1B5-46E2-185B-7A8E-B70721C7DD1D}"/>
+              </a:ext>
+            </a:extLst>
+          </p:cNvPr>
+          <p:cNvSpPr/>
+          <p:nvPr/>
+        </p:nvSpPr>
+        <p:spPr>
+          <a:xfrm>
+            <a:off x="792328" y="823976"/>
+            <a:ext cx="10241280" cy="548640"/>
+          </a:xfrm>
+          <a:prstGeom prst="rect">
+            <a:avLst/>
+          </a:prstGeom>
+          <a:noFill/>
+          <a:ln/>
+        </p:spPr>
+        <p:txBody>
+          <a:bodyPr wrap="square" rtlCol="0" anchor="ctr"/>
+          <a:lstStyle/>
+          <a:p>
+            <a:r>
+              <a:rPr lang="zh-TW" altLang="en-US" sz="2800" b="1" dirty="0">
+                <a:solidFill>
+                  <a:srgbClr val="1E293B"/>
+                </a:solidFill>
+                <a:latin typeface="微軟正黑體" panose="020B0604030504040204" pitchFamily="34" charset="-120"/>
+                <a:ea typeface="微軟正黑體" panose="020B0604030504040204" pitchFamily="34" charset="-120"/>
+                <a:cs typeface="Cambria" pitchFamily="34" charset="-120"/>
+              </a:rPr>
+              <a:t>新增商品</a:t>
+            </a:r>
+          </a:p>
+        </p:txBody>
+      </p:sp>
     </p:spTree>
     <p:extLst>
       <p:ext uri="{BB962C8B-B14F-4D97-AF65-F5344CB8AC3E}">
@@ -7437,94 +7325,6 @@
       </p:sp>
       <p:sp>
         <p:nvSpPr>
-          <p:cNvPr id="3" name="Text 1">
-            <a:extLst>
-              <a:ext uri="{FF2B5EF4-FFF2-40B4-BE49-F238E27FC236}">
-                <a16:creationId xmlns:a16="http://schemas.microsoft.com/office/drawing/2014/main" id="{F0A51451-DA66-5CE8-C120-C852A3C08E04}"/>
-              </a:ext>
-            </a:extLst>
-          </p:cNvPr>
-          <p:cNvSpPr/>
-          <p:nvPr/>
-        </p:nvSpPr>
-        <p:spPr>
-          <a:xfrm>
-            <a:off x="1432408" y="438912"/>
-            <a:ext cx="9144000" cy="320040"/>
-          </a:xfrm>
-          <a:prstGeom prst="rect">
-            <a:avLst/>
-          </a:prstGeom>
-          <a:noFill/>
-          <a:ln/>
-        </p:spPr>
-        <p:txBody>
-          <a:bodyPr wrap="square" rtlCol="0" anchor="ctr"/>
-          <a:lstStyle/>
-          <a:p>
-            <a:pPr marL="0" indent="0">
-              <a:buNone/>
-            </a:pPr>
-            <a:r>
-              <a:rPr lang="en-US" sz="1300" b="1" kern="0" spc="100" dirty="0">
-                <a:solidFill>
-                  <a:srgbClr val="CC6600"/>
-                </a:solidFill>
-                <a:latin typeface="微軟正黑體" panose="020B0604030504040204" pitchFamily="34" charset="-120"/>
-                <a:ea typeface="微軟正黑體" panose="020B0604030504040204" pitchFamily="34" charset="-120"/>
-                <a:cs typeface="Calibri" pitchFamily="34" charset="-120"/>
-              </a:rPr>
-              <a:t>STOCK</a:t>
-            </a:r>
-          </a:p>
-        </p:txBody>
-      </p:sp>
-      <p:sp>
-        <p:nvSpPr>
-          <p:cNvPr id="4" name="Text 2">
-            <a:extLst>
-              <a:ext uri="{FF2B5EF4-FFF2-40B4-BE49-F238E27FC236}">
-                <a16:creationId xmlns:a16="http://schemas.microsoft.com/office/drawing/2014/main" id="{92D8F0D8-5E54-2271-494C-67941ACEA6AE}"/>
-              </a:ext>
-            </a:extLst>
-          </p:cNvPr>
-          <p:cNvSpPr/>
-          <p:nvPr/>
-        </p:nvSpPr>
-        <p:spPr>
-          <a:xfrm>
-            <a:off x="1432408" y="722376"/>
-            <a:ext cx="9601200" cy="548640"/>
-          </a:xfrm>
-          <a:prstGeom prst="rect">
-            <a:avLst/>
-          </a:prstGeom>
-          <a:noFill/>
-          <a:ln/>
-        </p:spPr>
-        <p:txBody>
-          <a:bodyPr wrap="square" rtlCol="0" anchor="ctr"/>
-          <a:lstStyle/>
-          <a:p>
-            <a:pPr marL="0" indent="0">
-              <a:buNone/>
-            </a:pPr>
-            <a:r>
-              <a:rPr lang="zh-TW" altLang="en-US" sz="2800" b="1" dirty="0">
-                <a:solidFill>
-                  <a:srgbClr val="1E293B"/>
-                </a:solidFill>
-                <a:latin typeface="微軟正黑體" panose="020B0604030504040204" pitchFamily="34" charset="-120"/>
-                <a:ea typeface="微軟正黑體" panose="020B0604030504040204" pitchFamily="34" charset="-120"/>
-                <a:cs typeface="Cambria" pitchFamily="34" charset="-120"/>
-              </a:rPr>
-              <a:t>庫存總表</a:t>
-            </a:r>
-          </a:p>
-        </p:txBody>
-      </p:sp>
-      <p:sp>
-        <p:nvSpPr>
           <p:cNvPr id="5" name="Shape 4">
             <a:extLst>
               <a:ext uri="{FF2B5EF4-FFF2-40B4-BE49-F238E27FC236}">
@@ -8217,36 +8017,88 @@
           </a:p>
         </p:txBody>
       </p:sp>
-      <p:pic>
-        <p:nvPicPr>
-          <p:cNvPr id="18" name="Image 0" descr="preencoded.png">
-            <a:extLst>
-              <a:ext uri="{FF2B5EF4-FFF2-40B4-BE49-F238E27FC236}">
-                <a16:creationId xmlns:a16="http://schemas.microsoft.com/office/drawing/2014/main" id="{23520DFA-F454-E6D3-CE39-4DC1EA71EE08}"/>
-              </a:ext>
-            </a:extLst>
-          </p:cNvPr>
-          <p:cNvPicPr>
-            <a:picLocks noChangeAspect="1"/>
-          </p:cNvPicPr>
-          <p:nvPr/>
-        </p:nvPicPr>
-        <p:blipFill>
-          <a:blip r:embed="rId2"/>
-          <a:stretch>
-            <a:fillRect/>
-          </a:stretch>
-        </p:blipFill>
-        <p:spPr>
-          <a:xfrm>
-            <a:off x="727686" y="660729"/>
-            <a:ext cx="379476" cy="379476"/>
-          </a:xfrm>
-          <a:prstGeom prst="rect">
-            <a:avLst/>
-          </a:prstGeom>
-        </p:spPr>
-      </p:pic>
+      <p:sp>
+        <p:nvSpPr>
+          <p:cNvPr id="19" name="Text 1">
+            <a:extLst>
+              <a:ext uri="{FF2B5EF4-FFF2-40B4-BE49-F238E27FC236}">
+                <a16:creationId xmlns:a16="http://schemas.microsoft.com/office/drawing/2014/main" id="{CFED083B-D1A3-7676-3C1B-14072616032E}"/>
+              </a:ext>
+            </a:extLst>
+          </p:cNvPr>
+          <p:cNvSpPr/>
+          <p:nvPr/>
+        </p:nvSpPr>
+        <p:spPr>
+          <a:xfrm>
+            <a:off x="792328" y="515112"/>
+            <a:ext cx="9784080" cy="320040"/>
+          </a:xfrm>
+          <a:prstGeom prst="rect">
+            <a:avLst/>
+          </a:prstGeom>
+          <a:noFill/>
+          <a:ln/>
+        </p:spPr>
+        <p:txBody>
+          <a:bodyPr wrap="square" rtlCol="0" anchor="ctr"/>
+          <a:lstStyle/>
+          <a:p>
+            <a:r>
+              <a:rPr lang="en-US" altLang="zh-TW" sz="1200" b="1" kern="0" spc="100" dirty="0">
+                <a:solidFill>
+                  <a:srgbClr val="CC6600"/>
+                </a:solidFill>
+                <a:latin typeface="微軟正黑體" panose="020B0604030504040204" pitchFamily="34" charset="-120"/>
+                <a:ea typeface="微軟正黑體" panose="020B0604030504040204" pitchFamily="34" charset="-120"/>
+                <a:cs typeface="Calibri" pitchFamily="34" charset="-120"/>
+              </a:rPr>
+              <a:t>STOCK</a:t>
+            </a:r>
+          </a:p>
+        </p:txBody>
+      </p:sp>
+      <p:sp>
+        <p:nvSpPr>
+          <p:cNvPr id="21" name="Text 2">
+            <a:extLst>
+              <a:ext uri="{FF2B5EF4-FFF2-40B4-BE49-F238E27FC236}">
+                <a16:creationId xmlns:a16="http://schemas.microsoft.com/office/drawing/2014/main" id="{69483DA7-B919-723E-F247-F4DB43C01060}"/>
+              </a:ext>
+            </a:extLst>
+          </p:cNvPr>
+          <p:cNvSpPr/>
+          <p:nvPr/>
+        </p:nvSpPr>
+        <p:spPr>
+          <a:xfrm>
+            <a:off x="792328" y="823976"/>
+            <a:ext cx="10241280" cy="548640"/>
+          </a:xfrm>
+          <a:prstGeom prst="rect">
+            <a:avLst/>
+          </a:prstGeom>
+          <a:noFill/>
+          <a:ln/>
+        </p:spPr>
+        <p:txBody>
+          <a:bodyPr wrap="square" rtlCol="0" anchor="ctr"/>
+          <a:lstStyle/>
+          <a:p>
+            <a:r>
+              <a:rPr lang="zh-TW" altLang="en-US" sz="2800" b="1" dirty="0">
+                <a:solidFill>
+                  <a:srgbClr val="1E293B"/>
+                </a:solidFill>
+                <a:latin typeface="微軟正黑體" panose="020B0604030504040204" pitchFamily="34" charset="-120"/>
+                <a:ea typeface="微軟正黑體" panose="020B0604030504040204" pitchFamily="34" charset="-120"/>
+                <a:cs typeface="Cambria" pitchFamily="34" charset="-120"/>
+              </a:rPr>
+              <a:t>庫存總表</a:t>
+            </a:r>
+          </a:p>
+        </p:txBody>
+      </p:sp>
     </p:spTree>
     <p:extLst>
       <p:ext uri="{BB962C8B-B14F-4D97-AF65-F5344CB8AC3E}">
@@ -8309,94 +8161,6 @@
       </p:sp>
       <p:sp>
         <p:nvSpPr>
-          <p:cNvPr id="3" name="Text 1">
-            <a:extLst>
-              <a:ext uri="{FF2B5EF4-FFF2-40B4-BE49-F238E27FC236}">
-                <a16:creationId xmlns:a16="http://schemas.microsoft.com/office/drawing/2014/main" id="{4E38EBB8-02A5-4D9E-1C6E-9155F22B78B5}"/>
-              </a:ext>
-            </a:extLst>
-          </p:cNvPr>
-          <p:cNvSpPr/>
-          <p:nvPr/>
-        </p:nvSpPr>
-        <p:spPr>
-          <a:xfrm>
-            <a:off x="1432408" y="438912"/>
-            <a:ext cx="9144000" cy="320040"/>
-          </a:xfrm>
-          <a:prstGeom prst="rect">
-            <a:avLst/>
-          </a:prstGeom>
-          <a:noFill/>
-          <a:ln/>
-        </p:spPr>
-        <p:txBody>
-          <a:bodyPr wrap="square" rtlCol="0" anchor="ctr"/>
-          <a:lstStyle/>
-          <a:p>
-            <a:pPr marL="0" indent="0">
-              <a:buNone/>
-            </a:pPr>
-            <a:r>
-              <a:rPr lang="en-US" sz="1300" b="1" kern="0" spc="100" dirty="0">
-                <a:solidFill>
-                  <a:srgbClr val="CC6600"/>
-                </a:solidFill>
-                <a:latin typeface="微軟正黑體" panose="020B0604030504040204" pitchFamily="34" charset="-120"/>
-                <a:ea typeface="微軟正黑體" panose="020B0604030504040204" pitchFamily="34" charset="-120"/>
-                <a:cs typeface="Calibri" pitchFamily="34" charset="-120"/>
-              </a:rPr>
-              <a:t>PURCHASE ORDER (PO) </a:t>
-            </a:r>
-          </a:p>
-        </p:txBody>
-      </p:sp>
-      <p:sp>
-        <p:nvSpPr>
-          <p:cNvPr id="4" name="Text 2">
-            <a:extLst>
-              <a:ext uri="{FF2B5EF4-FFF2-40B4-BE49-F238E27FC236}">
-                <a16:creationId xmlns:a16="http://schemas.microsoft.com/office/drawing/2014/main" id="{54EB4C0A-2E85-61FB-ABD3-152A11551E3F}"/>
-              </a:ext>
-            </a:extLst>
-          </p:cNvPr>
-          <p:cNvSpPr/>
-          <p:nvPr/>
-        </p:nvSpPr>
-        <p:spPr>
-          <a:xfrm>
-            <a:off x="1432408" y="722376"/>
-            <a:ext cx="9601200" cy="548640"/>
-          </a:xfrm>
-          <a:prstGeom prst="rect">
-            <a:avLst/>
-          </a:prstGeom>
-          <a:noFill/>
-          <a:ln/>
-        </p:spPr>
-        <p:txBody>
-          <a:bodyPr wrap="square" rtlCol="0" anchor="ctr"/>
-          <a:lstStyle/>
-          <a:p>
-            <a:pPr marL="0" indent="0">
-              <a:buNone/>
-            </a:pPr>
-            <a:r>
-              <a:rPr lang="zh-TW" altLang="en-US" sz="2800" b="1" dirty="0">
-                <a:solidFill>
-                  <a:srgbClr val="1E293B"/>
-                </a:solidFill>
-                <a:latin typeface="微軟正黑體" panose="020B0604030504040204" pitchFamily="34" charset="-120"/>
-                <a:ea typeface="微軟正黑體" panose="020B0604030504040204" pitchFamily="34" charset="-120"/>
-                <a:cs typeface="Cambria" pitchFamily="34" charset="-120"/>
-              </a:rPr>
-              <a:t>採購進貨單</a:t>
-            </a:r>
-          </a:p>
-        </p:txBody>
-      </p:sp>
-      <p:sp>
-        <p:nvSpPr>
           <p:cNvPr id="5" name="Shape 4">
             <a:extLst>
               <a:ext uri="{FF2B5EF4-FFF2-40B4-BE49-F238E27FC236}">
@@ -9122,36 +8886,6 @@
           </a:p>
         </p:txBody>
       </p:sp>
-      <p:pic>
-        <p:nvPicPr>
-          <p:cNvPr id="20" name="Image 0" descr="preencoded.png">
-            <a:extLst>
-              <a:ext uri="{FF2B5EF4-FFF2-40B4-BE49-F238E27FC236}">
-                <a16:creationId xmlns:a16="http://schemas.microsoft.com/office/drawing/2014/main" id="{94B884BA-729F-8489-0FCD-0DED0BA8D413}"/>
-              </a:ext>
-            </a:extLst>
-          </p:cNvPr>
-          <p:cNvPicPr>
-            <a:picLocks noChangeAspect="1"/>
-          </p:cNvPicPr>
-          <p:nvPr/>
-        </p:nvPicPr>
-        <p:blipFill>
-          <a:blip r:embed="rId2"/>
-          <a:stretch>
-            <a:fillRect/>
-          </a:stretch>
-        </p:blipFill>
-        <p:spPr>
-          <a:xfrm>
-            <a:off x="715621" y="662261"/>
-            <a:ext cx="389889" cy="389889"/>
-          </a:xfrm>
-          <a:prstGeom prst="rect">
-            <a:avLst/>
-          </a:prstGeom>
-        </p:spPr>
-      </p:pic>
       <p:sp>
         <p:nvSpPr>
           <p:cNvPr id="21" name="Shape 12">
@@ -9272,6 +9006,88 @@
                 <a:cs typeface="Courier New" pitchFamily="34" charset="-120"/>
               </a:rPr>
               <a:t>付款狀態為「已付訖」後，自動回填採購進貨單為「已立帳核銷」，並依付款方式回填核銷日期（支票回填預兌日期、匯款回填付款日期）</a:t>
+            </a:r>
+          </a:p>
+        </p:txBody>
+      </p:sp>
+      <p:sp>
+        <p:nvSpPr>
+          <p:cNvPr id="18" name="Text 1">
+            <a:extLst>
+              <a:ext uri="{FF2B5EF4-FFF2-40B4-BE49-F238E27FC236}">
+                <a16:creationId xmlns:a16="http://schemas.microsoft.com/office/drawing/2014/main" id="{50CC8E32-8AA4-A6E0-2D13-0928E908A1ED}"/>
+              </a:ext>
+            </a:extLst>
+          </p:cNvPr>
+          <p:cNvSpPr/>
+          <p:nvPr/>
+        </p:nvSpPr>
+        <p:spPr>
+          <a:xfrm>
+            <a:off x="792328" y="515112"/>
+            <a:ext cx="9784080" cy="320040"/>
+          </a:xfrm>
+          <a:prstGeom prst="rect">
+            <a:avLst/>
+          </a:prstGeom>
+          <a:noFill/>
+          <a:ln/>
+        </p:spPr>
+        <p:txBody>
+          <a:bodyPr wrap="square" rtlCol="0" anchor="ctr"/>
+          <a:lstStyle/>
+          <a:p>
+            <a:r>
+              <a:rPr lang="en-US" altLang="zh-TW" sz="1200" b="1" kern="0" spc="100" dirty="0">
+                <a:solidFill>
+                  <a:srgbClr val="CC6600"/>
+                </a:solidFill>
+                <a:latin typeface="微軟正黑體" panose="020B0604030504040204" pitchFamily="34" charset="-120"/>
+                <a:ea typeface="微軟正黑體" panose="020B0604030504040204" pitchFamily="34" charset="-120"/>
+                <a:cs typeface="Calibri" pitchFamily="34" charset="-120"/>
+              </a:rPr>
+              <a:t>PURCHASE ORDER (PO) </a:t>
+            </a:r>
+          </a:p>
+        </p:txBody>
+      </p:sp>
+      <p:sp>
+        <p:nvSpPr>
+          <p:cNvPr id="24" name="Text 2">
+            <a:extLst>
+              <a:ext uri="{FF2B5EF4-FFF2-40B4-BE49-F238E27FC236}">
+                <a16:creationId xmlns:a16="http://schemas.microsoft.com/office/drawing/2014/main" id="{4ECCE6EC-7688-4004-3590-AD16560DE1F9}"/>
+              </a:ext>
+            </a:extLst>
+          </p:cNvPr>
+          <p:cNvSpPr/>
+          <p:nvPr/>
+        </p:nvSpPr>
+        <p:spPr>
+          <a:xfrm>
+            <a:off x="792328" y="823976"/>
+            <a:ext cx="10241280" cy="548640"/>
+          </a:xfrm>
+          <a:prstGeom prst="rect">
+            <a:avLst/>
+          </a:prstGeom>
+          <a:noFill/>
+          <a:ln/>
+        </p:spPr>
+        <p:txBody>
+          <a:bodyPr wrap="square" rtlCol="0" anchor="ctr"/>
+          <a:lstStyle/>
+          <a:p>
+            <a:r>
+              <a:rPr lang="zh-TW" altLang="en-US" sz="2800" b="1" dirty="0">
+                <a:solidFill>
+                  <a:srgbClr val="1E293B"/>
+                </a:solidFill>
+                <a:latin typeface="微軟正黑體" panose="020B0604030504040204" pitchFamily="34" charset="-120"/>
+                <a:ea typeface="微軟正黑體" panose="020B0604030504040204" pitchFamily="34" charset="-120"/>
+                <a:cs typeface="Cambria" pitchFamily="34" charset="-120"/>
+              </a:rPr>
+              <a:t>採購進貨單</a:t>
             </a:r>
           </a:p>
         </p:txBody>
@@ -9294,7 +9110,13 @@
   <p:cSld>
     <p:spTree>
       <p:nvGrpSpPr>
-        <p:cNvPr id="1" name=""/>
+        <p:cNvPr id="1" name="">
+          <a:extLst>
+            <a:ext uri="{FF2B5EF4-FFF2-40B4-BE49-F238E27FC236}">
+              <a16:creationId xmlns:a16="http://schemas.microsoft.com/office/drawing/2014/main" id="{8C60C9D5-6727-A2A7-6145-A880C365D3CF}"/>
+            </a:ext>
+          </a:extLst>
+        </p:cNvPr>
         <p:cNvGrpSpPr/>
         <p:nvPr/>
       </p:nvGrpSpPr>
@@ -9311,7 +9133,7 @@
           <p:cNvPr id="2" name="投影片編號版面配置區 1">
             <a:extLst>
               <a:ext uri="{FF2B5EF4-FFF2-40B4-BE49-F238E27FC236}">
-                <a16:creationId xmlns:a16="http://schemas.microsoft.com/office/drawing/2014/main" id="{ABC153D1-9AE3-8924-72A4-583C38E74F0C}"/>
+                <a16:creationId xmlns:a16="http://schemas.microsoft.com/office/drawing/2014/main" id="{B5C84BC8-7B8C-06D0-8BA5-27666AE3F5D1}"/>
               </a:ext>
             </a:extLst>
           </p:cNvPr>
@@ -9338,98 +9160,10 @@
       </p:sp>
       <p:sp>
         <p:nvSpPr>
-          <p:cNvPr id="3" name="Text 1">
-            <a:extLst>
-              <a:ext uri="{FF2B5EF4-FFF2-40B4-BE49-F238E27FC236}">
-                <a16:creationId xmlns:a16="http://schemas.microsoft.com/office/drawing/2014/main" id="{1784504B-73B7-D25B-3A03-CA48833FD32C}"/>
-              </a:ext>
-            </a:extLst>
-          </p:cNvPr>
-          <p:cNvSpPr/>
-          <p:nvPr/>
-        </p:nvSpPr>
-        <p:spPr>
-          <a:xfrm>
-            <a:off x="1432408" y="438912"/>
-            <a:ext cx="9144000" cy="320040"/>
-          </a:xfrm>
-          <a:prstGeom prst="rect">
-            <a:avLst/>
-          </a:prstGeom>
-          <a:noFill/>
-          <a:ln/>
-        </p:spPr>
-        <p:txBody>
-          <a:bodyPr wrap="square" rtlCol="0" anchor="ctr"/>
-          <a:lstStyle/>
-          <a:p>
-            <a:pPr marL="0" indent="0">
-              <a:buNone/>
-            </a:pPr>
-            <a:r>
-              <a:rPr lang="en-US" sz="1300" b="1" kern="0" spc="100" dirty="0">
-                <a:solidFill>
-                  <a:srgbClr val="CC6600"/>
-                </a:solidFill>
-                <a:latin typeface="微軟正黑體" panose="020B0604030504040204" pitchFamily="34" charset="-120"/>
-                <a:ea typeface="微軟正黑體" panose="020B0604030504040204" pitchFamily="34" charset="-120"/>
-                <a:cs typeface="Calibri" pitchFamily="34" charset="-120"/>
-              </a:rPr>
-              <a:t>ACCOUNTS PAYABLE</a:t>
-            </a:r>
-          </a:p>
-        </p:txBody>
-      </p:sp>
-      <p:sp>
-        <p:nvSpPr>
-          <p:cNvPr id="4" name="Text 2">
-            <a:extLst>
-              <a:ext uri="{FF2B5EF4-FFF2-40B4-BE49-F238E27FC236}">
-                <a16:creationId xmlns:a16="http://schemas.microsoft.com/office/drawing/2014/main" id="{216785DC-FEBF-3804-C755-5C03F6DEFD0C}"/>
-              </a:ext>
-            </a:extLst>
-          </p:cNvPr>
-          <p:cNvSpPr/>
-          <p:nvPr/>
-        </p:nvSpPr>
-        <p:spPr>
-          <a:xfrm>
-            <a:off x="1432408" y="722376"/>
-            <a:ext cx="9601200" cy="548640"/>
-          </a:xfrm>
-          <a:prstGeom prst="rect">
-            <a:avLst/>
-          </a:prstGeom>
-          <a:noFill/>
-          <a:ln/>
-        </p:spPr>
-        <p:txBody>
-          <a:bodyPr wrap="square" rtlCol="0" anchor="ctr"/>
-          <a:lstStyle/>
-          <a:p>
-            <a:pPr marL="0" indent="0">
-              <a:buNone/>
-            </a:pPr>
-            <a:r>
-              <a:rPr lang="zh-TW" altLang="en-US" sz="2800" b="1" dirty="0">
-                <a:solidFill>
-                  <a:srgbClr val="1E293B"/>
-                </a:solidFill>
-                <a:latin typeface="微軟正黑體" panose="020B0604030504040204" pitchFamily="34" charset="-120"/>
-                <a:ea typeface="微軟正黑體" panose="020B0604030504040204" pitchFamily="34" charset="-120"/>
-                <a:cs typeface="Cambria" pitchFamily="34" charset="-120"/>
-              </a:rPr>
-              <a:t>應付款項</a:t>
-            </a:r>
-          </a:p>
-        </p:txBody>
-      </p:sp>
-      <p:sp>
-        <p:nvSpPr>
           <p:cNvPr id="5" name="Shape 3">
             <a:extLst>
               <a:ext uri="{FF2B5EF4-FFF2-40B4-BE49-F238E27FC236}">
-                <a16:creationId xmlns:a16="http://schemas.microsoft.com/office/drawing/2014/main" id="{102893BB-E6C4-3174-B723-E910EB1A94A7}"/>
+                <a16:creationId xmlns:a16="http://schemas.microsoft.com/office/drawing/2014/main" id="{77F67FFD-7B2A-473B-35B2-27C068D526E6}"/>
               </a:ext>
             </a:extLst>
           </p:cNvPr>
@@ -9455,7 +9189,7 @@
           <p:cNvPr id="6" name="Text 4">
             <a:extLst>
               <a:ext uri="{FF2B5EF4-FFF2-40B4-BE49-F238E27FC236}">
-                <a16:creationId xmlns:a16="http://schemas.microsoft.com/office/drawing/2014/main" id="{B7DE71E2-62CB-876C-FA2B-3878230819AA}"/>
+                <a16:creationId xmlns:a16="http://schemas.microsoft.com/office/drawing/2014/main" id="{5131D698-465F-9005-F6D3-2A77279C8F54}"/>
               </a:ext>
             </a:extLst>
           </p:cNvPr>
@@ -9503,7 +9237,7 @@
           <p:cNvPr id="7" name="Text 5">
             <a:extLst>
               <a:ext uri="{FF2B5EF4-FFF2-40B4-BE49-F238E27FC236}">
-                <a16:creationId xmlns:a16="http://schemas.microsoft.com/office/drawing/2014/main" id="{41B34219-127F-9EFD-7EE7-1F32232F7BB4}"/>
+                <a16:creationId xmlns:a16="http://schemas.microsoft.com/office/drawing/2014/main" id="{573222C1-2359-6985-1225-899062172BC3}"/>
               </a:ext>
             </a:extLst>
           </p:cNvPr>
@@ -9685,7 +9419,7 @@
           <p:cNvPr id="8" name="Shape 6">
             <a:extLst>
               <a:ext uri="{FF2B5EF4-FFF2-40B4-BE49-F238E27FC236}">
-                <a16:creationId xmlns:a16="http://schemas.microsoft.com/office/drawing/2014/main" id="{B1C8F753-72A8-AF2B-2317-A073130A8C78}"/>
+                <a16:creationId xmlns:a16="http://schemas.microsoft.com/office/drawing/2014/main" id="{2E418BB8-F1C5-D3E6-C986-7796E7FEFD53}"/>
               </a:ext>
             </a:extLst>
           </p:cNvPr>
@@ -9711,7 +9445,7 @@
           <p:cNvPr id="9" name="Text 7">
             <a:extLst>
               <a:ext uri="{FF2B5EF4-FFF2-40B4-BE49-F238E27FC236}">
-                <a16:creationId xmlns:a16="http://schemas.microsoft.com/office/drawing/2014/main" id="{3FFEEF89-0BEA-6838-E8AC-32CD5238863E}"/>
+                <a16:creationId xmlns:a16="http://schemas.microsoft.com/office/drawing/2014/main" id="{5D22B204-4C81-4627-F174-0F17E58700B0}"/>
               </a:ext>
             </a:extLst>
           </p:cNvPr>
@@ -9759,7 +9493,7 @@
           <p:cNvPr id="10" name="Text 8">
             <a:extLst>
               <a:ext uri="{FF2B5EF4-FFF2-40B4-BE49-F238E27FC236}">
-                <a16:creationId xmlns:a16="http://schemas.microsoft.com/office/drawing/2014/main" id="{503934D5-8146-F7F1-E592-C8BD4E223AE6}"/>
+                <a16:creationId xmlns:a16="http://schemas.microsoft.com/office/drawing/2014/main" id="{418E7478-9A08-EBAE-14F2-B0FFA6ACDA03}"/>
               </a:ext>
             </a:extLst>
           </p:cNvPr>
@@ -9810,7 +9544,7 @@
           <p:cNvPr id="11" name="Shape 9">
             <a:extLst>
               <a:ext uri="{FF2B5EF4-FFF2-40B4-BE49-F238E27FC236}">
-                <a16:creationId xmlns:a16="http://schemas.microsoft.com/office/drawing/2014/main" id="{1EEE3B73-D064-72A9-8DFA-A20B53BC93E8}"/>
+                <a16:creationId xmlns:a16="http://schemas.microsoft.com/office/drawing/2014/main" id="{1F2D183F-C9B2-233C-446B-2F0DDB7434AF}"/>
               </a:ext>
             </a:extLst>
           </p:cNvPr>
@@ -9836,7 +9570,7 @@
           <p:cNvPr id="12" name="Text 10">
             <a:extLst>
               <a:ext uri="{FF2B5EF4-FFF2-40B4-BE49-F238E27FC236}">
-                <a16:creationId xmlns:a16="http://schemas.microsoft.com/office/drawing/2014/main" id="{54B7DB74-27E8-E7F7-EBEE-D65B3DB317BA}"/>
+                <a16:creationId xmlns:a16="http://schemas.microsoft.com/office/drawing/2014/main" id="{9FE590C0-87E6-66C7-370A-973A92C829F1}"/>
               </a:ext>
             </a:extLst>
           </p:cNvPr>
@@ -9884,7 +9618,7 @@
           <p:cNvPr id="13" name="Text 11">
             <a:extLst>
               <a:ext uri="{FF2B5EF4-FFF2-40B4-BE49-F238E27FC236}">
-                <a16:creationId xmlns:a16="http://schemas.microsoft.com/office/drawing/2014/main" id="{62A9FEB7-B9B6-25C8-5234-90BEBE4A761D}"/>
+                <a16:creationId xmlns:a16="http://schemas.microsoft.com/office/drawing/2014/main" id="{6DF9D9BC-60EB-6C50-22F0-6D2871D82916}"/>
               </a:ext>
             </a:extLst>
           </p:cNvPr>
@@ -9935,7 +9669,7 @@
           <p:cNvPr id="14" name="Shape 12">
             <a:extLst>
               <a:ext uri="{FF2B5EF4-FFF2-40B4-BE49-F238E27FC236}">
-                <a16:creationId xmlns:a16="http://schemas.microsoft.com/office/drawing/2014/main" id="{4B71CFFF-BFC3-1A58-F8AC-70AD5B5E2E7E}"/>
+                <a16:creationId xmlns:a16="http://schemas.microsoft.com/office/drawing/2014/main" id="{93142FCF-18F8-DD9C-7BAA-2B40F3C8EBDD}"/>
               </a:ext>
             </a:extLst>
           </p:cNvPr>
@@ -9968,7 +9702,7 @@
           <p:cNvPr id="15" name="Text 13">
             <a:extLst>
               <a:ext uri="{FF2B5EF4-FFF2-40B4-BE49-F238E27FC236}">
-                <a16:creationId xmlns:a16="http://schemas.microsoft.com/office/drawing/2014/main" id="{1292C31C-54E0-7C3D-A2FC-64C87570A0D8}"/>
+                <a16:creationId xmlns:a16="http://schemas.microsoft.com/office/drawing/2014/main" id="{4F74E72E-1F82-43CE-DE69-BE8C6CCDD6C8}"/>
               </a:ext>
             </a:extLst>
           </p:cNvPr>
@@ -10016,7 +9750,7 @@
           <p:cNvPr id="16" name="Text 14">
             <a:extLst>
               <a:ext uri="{FF2B5EF4-FFF2-40B4-BE49-F238E27FC236}">
-                <a16:creationId xmlns:a16="http://schemas.microsoft.com/office/drawing/2014/main" id="{DF6D1856-95EB-0C28-D505-E7C954810B66}"/>
+                <a16:creationId xmlns:a16="http://schemas.microsoft.com/office/drawing/2014/main" id="{63A4F75C-7694-A51D-2F66-69CF84E91530}"/>
               </a:ext>
             </a:extLst>
           </p:cNvPr>
@@ -10062,40 +9796,92 @@
           </a:p>
         </p:txBody>
       </p:sp>
-      <p:pic>
-        <p:nvPicPr>
-          <p:cNvPr id="17" name="Image 3" descr="preencoded.png">
-            <a:extLst>
-              <a:ext uri="{FF2B5EF4-FFF2-40B4-BE49-F238E27FC236}">
-                <a16:creationId xmlns:a16="http://schemas.microsoft.com/office/drawing/2014/main" id="{F1C3574C-36B7-D19C-1451-51E50372B67C}"/>
-              </a:ext>
-            </a:extLst>
-          </p:cNvPr>
-          <p:cNvPicPr>
-            <a:picLocks noChangeAspect="1"/>
-          </p:cNvPicPr>
-          <p:nvPr/>
-        </p:nvPicPr>
-        <p:blipFill>
-          <a:blip r:embed="rId2"/>
-          <a:stretch>
-            <a:fillRect/>
-          </a:stretch>
-        </p:blipFill>
-        <p:spPr>
-          <a:xfrm>
-            <a:off x="727920" y="643621"/>
-            <a:ext cx="395021" cy="395021"/>
-          </a:xfrm>
-          <a:prstGeom prst="rect">
-            <a:avLst/>
-          </a:prstGeom>
-        </p:spPr>
-      </p:pic>
+      <p:sp>
+        <p:nvSpPr>
+          <p:cNvPr id="19" name="Text 1">
+            <a:extLst>
+              <a:ext uri="{FF2B5EF4-FFF2-40B4-BE49-F238E27FC236}">
+                <a16:creationId xmlns:a16="http://schemas.microsoft.com/office/drawing/2014/main" id="{796D903A-B869-6D07-2E50-EE0810187C91}"/>
+              </a:ext>
+            </a:extLst>
+          </p:cNvPr>
+          <p:cNvSpPr/>
+          <p:nvPr/>
+        </p:nvSpPr>
+        <p:spPr>
+          <a:xfrm>
+            <a:off x="792328" y="515112"/>
+            <a:ext cx="9784080" cy="320040"/>
+          </a:xfrm>
+          <a:prstGeom prst="rect">
+            <a:avLst/>
+          </a:prstGeom>
+          <a:noFill/>
+          <a:ln/>
+        </p:spPr>
+        <p:txBody>
+          <a:bodyPr wrap="square" rtlCol="0" anchor="ctr"/>
+          <a:lstStyle/>
+          <a:p>
+            <a:r>
+              <a:rPr lang="en-US" altLang="zh-TW" sz="1200" b="1" kern="0" spc="100" dirty="0">
+                <a:solidFill>
+                  <a:srgbClr val="CC6600"/>
+                </a:solidFill>
+                <a:latin typeface="微軟正黑體" panose="020B0604030504040204" pitchFamily="34" charset="-120"/>
+                <a:ea typeface="微軟正黑體" panose="020B0604030504040204" pitchFamily="34" charset="-120"/>
+                <a:cs typeface="Calibri" pitchFamily="34" charset="-120"/>
+              </a:rPr>
+              <a:t>ACCOUNTS PAYABLE</a:t>
+            </a:r>
+          </a:p>
+        </p:txBody>
+      </p:sp>
+      <p:sp>
+        <p:nvSpPr>
+          <p:cNvPr id="21" name="Text 2">
+            <a:extLst>
+              <a:ext uri="{FF2B5EF4-FFF2-40B4-BE49-F238E27FC236}">
+                <a16:creationId xmlns:a16="http://schemas.microsoft.com/office/drawing/2014/main" id="{06CB41FD-5589-9EED-DA01-ABB8F47BDF29}"/>
+              </a:ext>
+            </a:extLst>
+          </p:cNvPr>
+          <p:cNvSpPr/>
+          <p:nvPr/>
+        </p:nvSpPr>
+        <p:spPr>
+          <a:xfrm>
+            <a:off x="792328" y="823976"/>
+            <a:ext cx="10241280" cy="548640"/>
+          </a:xfrm>
+          <a:prstGeom prst="rect">
+            <a:avLst/>
+          </a:prstGeom>
+          <a:noFill/>
+          <a:ln/>
+        </p:spPr>
+        <p:txBody>
+          <a:bodyPr wrap="square" rtlCol="0" anchor="ctr"/>
+          <a:lstStyle/>
+          <a:p>
+            <a:r>
+              <a:rPr lang="zh-TW" altLang="en-US" sz="2800" b="1" dirty="0">
+                <a:solidFill>
+                  <a:srgbClr val="1E293B"/>
+                </a:solidFill>
+                <a:latin typeface="微軟正黑體" panose="020B0604030504040204" pitchFamily="34" charset="-120"/>
+                <a:ea typeface="微軟正黑體" panose="020B0604030504040204" pitchFamily="34" charset="-120"/>
+                <a:cs typeface="Cambria" pitchFamily="34" charset="-120"/>
+              </a:rPr>
+              <a:t>應付款項</a:t>
+            </a:r>
+          </a:p>
+        </p:txBody>
+      </p:sp>
     </p:spTree>
     <p:extLst>
       <p:ext uri="{BB962C8B-B14F-4D97-AF65-F5344CB8AC3E}">
-        <p14:creationId xmlns:p14="http://schemas.microsoft.com/office/powerpoint/2010/main" val="2615931190"/>
+        <p14:creationId xmlns:p14="http://schemas.microsoft.com/office/powerpoint/2010/main" val="571678596"/>
       </p:ext>
     </p:extLst>
   </p:cSld>
@@ -10154,94 +9940,6 @@
       </p:sp>
       <p:sp>
         <p:nvSpPr>
-          <p:cNvPr id="3" name="Text 1">
-            <a:extLst>
-              <a:ext uri="{FF2B5EF4-FFF2-40B4-BE49-F238E27FC236}">
-                <a16:creationId xmlns:a16="http://schemas.microsoft.com/office/drawing/2014/main" id="{B20C0ED9-CF6A-1A02-0A20-59B39DF8EF2E}"/>
-              </a:ext>
-            </a:extLst>
-          </p:cNvPr>
-          <p:cNvSpPr/>
-          <p:nvPr/>
-        </p:nvSpPr>
-        <p:spPr>
-          <a:xfrm>
-            <a:off x="1432408" y="438912"/>
-            <a:ext cx="9144000" cy="320040"/>
-          </a:xfrm>
-          <a:prstGeom prst="rect">
-            <a:avLst/>
-          </a:prstGeom>
-          <a:noFill/>
-          <a:ln/>
-        </p:spPr>
-        <p:txBody>
-          <a:bodyPr wrap="square" rtlCol="0" anchor="ctr"/>
-          <a:lstStyle/>
-          <a:p>
-            <a:pPr marL="0" indent="0">
-              <a:buNone/>
-            </a:pPr>
-            <a:r>
-              <a:rPr lang="en-US" sz="1300" b="1" kern="0" spc="100" dirty="0">
-                <a:solidFill>
-                  <a:srgbClr val="CC6600"/>
-                </a:solidFill>
-                <a:latin typeface="微軟正黑體" panose="020B0604030504040204" pitchFamily="34" charset="-120"/>
-                <a:ea typeface="微軟正黑體" panose="020B0604030504040204" pitchFamily="34" charset="-120"/>
-                <a:cs typeface="Calibri" pitchFamily="34" charset="-120"/>
-              </a:rPr>
-              <a:t>SHIPPING ORDER (SO)</a:t>
-            </a:r>
-          </a:p>
-        </p:txBody>
-      </p:sp>
-      <p:sp>
-        <p:nvSpPr>
-          <p:cNvPr id="4" name="Text 2">
-            <a:extLst>
-              <a:ext uri="{FF2B5EF4-FFF2-40B4-BE49-F238E27FC236}">
-                <a16:creationId xmlns:a16="http://schemas.microsoft.com/office/drawing/2014/main" id="{747D2C44-9293-A2D9-7FF0-746D528AE7BB}"/>
-              </a:ext>
-            </a:extLst>
-          </p:cNvPr>
-          <p:cNvSpPr/>
-          <p:nvPr/>
-        </p:nvSpPr>
-        <p:spPr>
-          <a:xfrm>
-            <a:off x="1432408" y="722376"/>
-            <a:ext cx="9601200" cy="548640"/>
-          </a:xfrm>
-          <a:prstGeom prst="rect">
-            <a:avLst/>
-          </a:prstGeom>
-          <a:noFill/>
-          <a:ln/>
-        </p:spPr>
-        <p:txBody>
-          <a:bodyPr wrap="square" rtlCol="0" anchor="ctr"/>
-          <a:lstStyle/>
-          <a:p>
-            <a:pPr marL="0" indent="0">
-              <a:buNone/>
-            </a:pPr>
-            <a:r>
-              <a:rPr lang="zh-TW" altLang="en-US" sz="2800" b="1" dirty="0">
-                <a:solidFill>
-                  <a:srgbClr val="1E293B"/>
-                </a:solidFill>
-                <a:latin typeface="微軟正黑體" panose="020B0604030504040204" pitchFamily="34" charset="-120"/>
-                <a:ea typeface="微軟正黑體" panose="020B0604030504040204" pitchFamily="34" charset="-120"/>
-                <a:cs typeface="Cambria" pitchFamily="34" charset="-120"/>
-              </a:rPr>
-              <a:t>銷貨出貨單</a:t>
-            </a:r>
-          </a:p>
-        </p:txBody>
-      </p:sp>
-      <p:sp>
-        <p:nvSpPr>
           <p:cNvPr id="5" name="Shape 4">
             <a:extLst>
               <a:ext uri="{FF2B5EF4-FFF2-40B4-BE49-F238E27FC236}">
@@ -10765,36 +10463,88 @@
           </a:p>
         </p:txBody>
       </p:sp>
-      <p:pic>
-        <p:nvPicPr>
-          <p:cNvPr id="17" name="Image 0" descr="preencoded.png">
-            <a:extLst>
-              <a:ext uri="{FF2B5EF4-FFF2-40B4-BE49-F238E27FC236}">
-                <a16:creationId xmlns:a16="http://schemas.microsoft.com/office/drawing/2014/main" id="{ABBB9E78-97BA-9F54-13A0-029860BC78A0}"/>
-              </a:ext>
-            </a:extLst>
-          </p:cNvPr>
-          <p:cNvPicPr>
-            <a:picLocks noChangeAspect="1"/>
-          </p:cNvPicPr>
-          <p:nvPr/>
-        </p:nvPicPr>
-        <p:blipFill>
-          <a:blip r:embed="rId2"/>
-          <a:stretch>
-            <a:fillRect/>
-          </a:stretch>
-        </p:blipFill>
-        <p:spPr>
-          <a:xfrm>
-            <a:off x="733407" y="693348"/>
-            <a:ext cx="384048" cy="384048"/>
-          </a:xfrm>
-          <a:prstGeom prst="rect">
-            <a:avLst/>
-          </a:prstGeom>
-        </p:spPr>
-      </p:pic>
+      <p:sp>
+        <p:nvSpPr>
+          <p:cNvPr id="19" name="Text 1">
+            <a:extLst>
+              <a:ext uri="{FF2B5EF4-FFF2-40B4-BE49-F238E27FC236}">
+                <a16:creationId xmlns:a16="http://schemas.microsoft.com/office/drawing/2014/main" id="{585E3AF8-BAB8-6757-6223-79CC8147C286}"/>
+              </a:ext>
+            </a:extLst>
+          </p:cNvPr>
+          <p:cNvSpPr/>
+          <p:nvPr/>
+        </p:nvSpPr>
+        <p:spPr>
+          <a:xfrm>
+            <a:off x="792328" y="515112"/>
+            <a:ext cx="9784080" cy="320040"/>
+          </a:xfrm>
+          <a:prstGeom prst="rect">
+            <a:avLst/>
+          </a:prstGeom>
+          <a:noFill/>
+          <a:ln/>
+        </p:spPr>
+        <p:txBody>
+          <a:bodyPr wrap="square" rtlCol="0" anchor="ctr"/>
+          <a:lstStyle/>
+          <a:p>
+            <a:r>
+              <a:rPr lang="en-US" altLang="zh-TW" sz="1200" b="1" kern="0" spc="100" dirty="0">
+                <a:solidFill>
+                  <a:srgbClr val="CC6600"/>
+                </a:solidFill>
+                <a:latin typeface="微軟正黑體" panose="020B0604030504040204" pitchFamily="34" charset="-120"/>
+                <a:ea typeface="微軟正黑體" panose="020B0604030504040204" pitchFamily="34" charset="-120"/>
+                <a:cs typeface="Calibri" pitchFamily="34" charset="-120"/>
+              </a:rPr>
+              <a:t>SHIPPING ORDER (SO)</a:t>
+            </a:r>
+          </a:p>
+        </p:txBody>
+      </p:sp>
+      <p:sp>
+        <p:nvSpPr>
+          <p:cNvPr id="21" name="Text 2">
+            <a:extLst>
+              <a:ext uri="{FF2B5EF4-FFF2-40B4-BE49-F238E27FC236}">
+                <a16:creationId xmlns:a16="http://schemas.microsoft.com/office/drawing/2014/main" id="{9A36D065-CE95-BAE8-6565-2C26497E7204}"/>
+              </a:ext>
+            </a:extLst>
+          </p:cNvPr>
+          <p:cNvSpPr/>
+          <p:nvPr/>
+        </p:nvSpPr>
+        <p:spPr>
+          <a:xfrm>
+            <a:off x="792328" y="823976"/>
+            <a:ext cx="10241280" cy="548640"/>
+          </a:xfrm>
+          <a:prstGeom prst="rect">
+            <a:avLst/>
+          </a:prstGeom>
+          <a:noFill/>
+          <a:ln/>
+        </p:spPr>
+        <p:txBody>
+          <a:bodyPr wrap="square" rtlCol="0" anchor="ctr"/>
+          <a:lstStyle/>
+          <a:p>
+            <a:r>
+              <a:rPr lang="zh-TW" altLang="en-US" sz="2800" b="1" dirty="0">
+                <a:solidFill>
+                  <a:srgbClr val="1E293B"/>
+                </a:solidFill>
+                <a:latin typeface="微軟正黑體" panose="020B0604030504040204" pitchFamily="34" charset="-120"/>
+                <a:ea typeface="微軟正黑體" panose="020B0604030504040204" pitchFamily="34" charset="-120"/>
+                <a:cs typeface="Cambria" pitchFamily="34" charset="-120"/>
+              </a:rPr>
+              <a:t>銷貨出貨單</a:t>
+            </a:r>
+          </a:p>
+        </p:txBody>
+      </p:sp>
     </p:spTree>
     <p:extLst>
       <p:ext uri="{BB962C8B-B14F-4D97-AF65-F5344CB8AC3E}">
@@ -10857,94 +10607,6 @@
       </p:sp>
       <p:sp>
         <p:nvSpPr>
-          <p:cNvPr id="3" name="Text 1">
-            <a:extLst>
-              <a:ext uri="{FF2B5EF4-FFF2-40B4-BE49-F238E27FC236}">
-                <a16:creationId xmlns:a16="http://schemas.microsoft.com/office/drawing/2014/main" id="{6D201932-0185-7F57-888E-6E0D26D45F1A}"/>
-              </a:ext>
-            </a:extLst>
-          </p:cNvPr>
-          <p:cNvSpPr/>
-          <p:nvPr/>
-        </p:nvSpPr>
-        <p:spPr>
-          <a:xfrm>
-            <a:off x="1432408" y="452628"/>
-            <a:ext cx="9144000" cy="320040"/>
-          </a:xfrm>
-          <a:prstGeom prst="rect">
-            <a:avLst/>
-          </a:prstGeom>
-          <a:noFill/>
-          <a:ln/>
-        </p:spPr>
-        <p:txBody>
-          <a:bodyPr wrap="square" rtlCol="0" anchor="ctr"/>
-          <a:lstStyle/>
-          <a:p>
-            <a:pPr marL="0" indent="0">
-              <a:buNone/>
-            </a:pPr>
-            <a:r>
-              <a:rPr lang="en-US" sz="1300" b="1" kern="0" spc="100" dirty="0">
-                <a:solidFill>
-                  <a:srgbClr val="CC6600"/>
-                </a:solidFill>
-                <a:latin typeface="微軟正黑體" panose="020B0604030504040204" pitchFamily="34" charset="-120"/>
-                <a:ea typeface="微軟正黑體" panose="020B0604030504040204" pitchFamily="34" charset="-120"/>
-                <a:cs typeface="Calibri" pitchFamily="34" charset="-120"/>
-              </a:rPr>
-              <a:t>ACCOUNTS RECEIVABLE</a:t>
-            </a:r>
-          </a:p>
-        </p:txBody>
-      </p:sp>
-      <p:sp>
-        <p:nvSpPr>
-          <p:cNvPr id="4" name="Text 2">
-            <a:extLst>
-              <a:ext uri="{FF2B5EF4-FFF2-40B4-BE49-F238E27FC236}">
-                <a16:creationId xmlns:a16="http://schemas.microsoft.com/office/drawing/2014/main" id="{0608804D-AB7A-4814-DE7E-6DD16411DE69}"/>
-              </a:ext>
-            </a:extLst>
-          </p:cNvPr>
-          <p:cNvSpPr/>
-          <p:nvPr/>
-        </p:nvSpPr>
-        <p:spPr>
-          <a:xfrm>
-            <a:off x="1432408" y="722376"/>
-            <a:ext cx="9601200" cy="548640"/>
-          </a:xfrm>
-          <a:prstGeom prst="rect">
-            <a:avLst/>
-          </a:prstGeom>
-          <a:noFill/>
-          <a:ln/>
-        </p:spPr>
-        <p:txBody>
-          <a:bodyPr wrap="square" rtlCol="0" anchor="ctr"/>
-          <a:lstStyle/>
-          <a:p>
-            <a:pPr marL="0" indent="0">
-              <a:buNone/>
-            </a:pPr>
-            <a:r>
-              <a:rPr lang="zh-TW" altLang="en-US" sz="2800" b="1" dirty="0">
-                <a:solidFill>
-                  <a:srgbClr val="1E293B"/>
-                </a:solidFill>
-                <a:latin typeface="微軟正黑體" panose="020B0604030504040204" pitchFamily="34" charset="-120"/>
-                <a:ea typeface="微軟正黑體" panose="020B0604030504040204" pitchFamily="34" charset="-120"/>
-                <a:cs typeface="Cambria" pitchFamily="34" charset="-120"/>
-              </a:rPr>
-              <a:t>應收款項</a:t>
-            </a:r>
-          </a:p>
-        </p:txBody>
-      </p:sp>
-      <p:sp>
-        <p:nvSpPr>
           <p:cNvPr id="5" name="Shape 3">
             <a:extLst>
               <a:ext uri="{FF2B5EF4-FFF2-40B4-BE49-F238E27FC236}">
@@ -11346,36 +11008,88 @@
           </a:p>
         </p:txBody>
       </p:sp>
-      <p:pic>
-        <p:nvPicPr>
-          <p:cNvPr id="17" name="Image 3" descr="preencoded.png">
-            <a:extLst>
-              <a:ext uri="{FF2B5EF4-FFF2-40B4-BE49-F238E27FC236}">
-                <a16:creationId xmlns:a16="http://schemas.microsoft.com/office/drawing/2014/main" id="{589B457C-F2AB-0B09-35BD-AFB11252912B}"/>
-              </a:ext>
-            </a:extLst>
-          </p:cNvPr>
-          <p:cNvPicPr>
-            <a:picLocks noChangeAspect="1"/>
-          </p:cNvPicPr>
-          <p:nvPr/>
-        </p:nvPicPr>
-        <p:blipFill>
-          <a:blip r:embed="rId2"/>
-          <a:stretch>
-            <a:fillRect/>
-          </a:stretch>
-        </p:blipFill>
-        <p:spPr>
-          <a:xfrm>
-            <a:off x="727920" y="642823"/>
-            <a:ext cx="395021" cy="395021"/>
-          </a:xfrm>
-          <a:prstGeom prst="rect">
-            <a:avLst/>
-          </a:prstGeom>
-        </p:spPr>
-      </p:pic>
+      <p:sp>
+        <p:nvSpPr>
+          <p:cNvPr id="12" name="Text 1">
+            <a:extLst>
+              <a:ext uri="{FF2B5EF4-FFF2-40B4-BE49-F238E27FC236}">
+                <a16:creationId xmlns:a16="http://schemas.microsoft.com/office/drawing/2014/main" id="{9BF279BB-47AA-8820-2F79-ADD4094C17CD}"/>
+              </a:ext>
+            </a:extLst>
+          </p:cNvPr>
+          <p:cNvSpPr/>
+          <p:nvPr/>
+        </p:nvSpPr>
+        <p:spPr>
+          <a:xfrm>
+            <a:off x="792328" y="515112"/>
+            <a:ext cx="9784080" cy="320040"/>
+          </a:xfrm>
+          <a:prstGeom prst="rect">
+            <a:avLst/>
+          </a:prstGeom>
+          <a:noFill/>
+          <a:ln/>
+        </p:spPr>
+        <p:txBody>
+          <a:bodyPr wrap="square" rtlCol="0" anchor="ctr"/>
+          <a:lstStyle/>
+          <a:p>
+            <a:r>
+              <a:rPr lang="en-US" altLang="zh-TW" sz="1200" b="1" kern="0" spc="100" dirty="0">
+                <a:solidFill>
+                  <a:srgbClr val="CC6600"/>
+                </a:solidFill>
+                <a:latin typeface="微軟正黑體" panose="020B0604030504040204" pitchFamily="34" charset="-120"/>
+                <a:ea typeface="微軟正黑體" panose="020B0604030504040204" pitchFamily="34" charset="-120"/>
+                <a:cs typeface="Calibri" pitchFamily="34" charset="-120"/>
+              </a:rPr>
+              <a:t>ACCOUNTS RECEIVABLE</a:t>
+            </a:r>
+          </a:p>
+        </p:txBody>
+      </p:sp>
+      <p:sp>
+        <p:nvSpPr>
+          <p:cNvPr id="18" name="Text 2">
+            <a:extLst>
+              <a:ext uri="{FF2B5EF4-FFF2-40B4-BE49-F238E27FC236}">
+                <a16:creationId xmlns:a16="http://schemas.microsoft.com/office/drawing/2014/main" id="{27C1F3B8-E66E-7FDA-010E-72DD12E4A16B}"/>
+              </a:ext>
+            </a:extLst>
+          </p:cNvPr>
+          <p:cNvSpPr/>
+          <p:nvPr/>
+        </p:nvSpPr>
+        <p:spPr>
+          <a:xfrm>
+            <a:off x="792328" y="823976"/>
+            <a:ext cx="10241280" cy="548640"/>
+          </a:xfrm>
+          <a:prstGeom prst="rect">
+            <a:avLst/>
+          </a:prstGeom>
+          <a:noFill/>
+          <a:ln/>
+        </p:spPr>
+        <p:txBody>
+          <a:bodyPr wrap="square" rtlCol="0" anchor="ctr"/>
+          <a:lstStyle/>
+          <a:p>
+            <a:r>
+              <a:rPr lang="zh-TW" altLang="en-US" sz="2800" b="1" dirty="0">
+                <a:solidFill>
+                  <a:srgbClr val="1E293B"/>
+                </a:solidFill>
+                <a:latin typeface="微軟正黑體" panose="020B0604030504040204" pitchFamily="34" charset="-120"/>
+                <a:ea typeface="微軟正黑體" panose="020B0604030504040204" pitchFamily="34" charset="-120"/>
+                <a:cs typeface="Cambria" pitchFamily="34" charset="-120"/>
+              </a:rPr>
+              <a:t>應收款項</a:t>
+            </a:r>
+          </a:p>
+        </p:txBody>
+      </p:sp>
     </p:spTree>
     <p:extLst>
       <p:ext uri="{BB962C8B-B14F-4D97-AF65-F5344CB8AC3E}">
@@ -11438,94 +11152,6 @@
       </p:sp>
       <p:sp>
         <p:nvSpPr>
-          <p:cNvPr id="3" name="Text 1">
-            <a:extLst>
-              <a:ext uri="{FF2B5EF4-FFF2-40B4-BE49-F238E27FC236}">
-                <a16:creationId xmlns:a16="http://schemas.microsoft.com/office/drawing/2014/main" id="{668361F9-B1E6-2688-8942-7FB638A5E2BE}"/>
-              </a:ext>
-            </a:extLst>
-          </p:cNvPr>
-          <p:cNvSpPr/>
-          <p:nvPr/>
-        </p:nvSpPr>
-        <p:spPr>
-          <a:xfrm>
-            <a:off x="1432408" y="438912"/>
-            <a:ext cx="9144000" cy="320040"/>
-          </a:xfrm>
-          <a:prstGeom prst="rect">
-            <a:avLst/>
-          </a:prstGeom>
-          <a:noFill/>
-          <a:ln/>
-        </p:spPr>
-        <p:txBody>
-          <a:bodyPr wrap="square" rtlCol="0" anchor="ctr"/>
-          <a:lstStyle/>
-          <a:p>
-            <a:pPr marL="0" indent="0">
-              <a:buNone/>
-            </a:pPr>
-            <a:r>
-              <a:rPr lang="en-US" sz="1300" b="1" kern="0" spc="100" dirty="0">
-                <a:solidFill>
-                  <a:srgbClr val="CC6600"/>
-                </a:solidFill>
-                <a:latin typeface="微軟正黑體" panose="020B0604030504040204" pitchFamily="34" charset="-120"/>
-                <a:ea typeface="微軟正黑體" panose="020B0604030504040204" pitchFamily="34" charset="-120"/>
-                <a:cs typeface="Calibri" pitchFamily="34" charset="-120"/>
-              </a:rPr>
-              <a:t>TRANSFER ORDER</a:t>
-            </a:r>
-          </a:p>
-        </p:txBody>
-      </p:sp>
-      <p:sp>
-        <p:nvSpPr>
-          <p:cNvPr id="4" name="Text 2">
-            <a:extLst>
-              <a:ext uri="{FF2B5EF4-FFF2-40B4-BE49-F238E27FC236}">
-                <a16:creationId xmlns:a16="http://schemas.microsoft.com/office/drawing/2014/main" id="{C7580C67-6BB7-5DE2-B3DB-6EF5F48EEF4B}"/>
-              </a:ext>
-            </a:extLst>
-          </p:cNvPr>
-          <p:cNvSpPr/>
-          <p:nvPr/>
-        </p:nvSpPr>
-        <p:spPr>
-          <a:xfrm>
-            <a:off x="1432408" y="722376"/>
-            <a:ext cx="9601200" cy="548640"/>
-          </a:xfrm>
-          <a:prstGeom prst="rect">
-            <a:avLst/>
-          </a:prstGeom>
-          <a:noFill/>
-          <a:ln/>
-        </p:spPr>
-        <p:txBody>
-          <a:bodyPr wrap="square" rtlCol="0" anchor="ctr"/>
-          <a:lstStyle/>
-          <a:p>
-            <a:pPr marL="0" indent="0">
-              <a:buNone/>
-            </a:pPr>
-            <a:r>
-              <a:rPr lang="zh-TW" altLang="en-US" sz="2800" b="1" dirty="0">
-                <a:solidFill>
-                  <a:srgbClr val="1E293B"/>
-                </a:solidFill>
-                <a:latin typeface="微軟正黑體" panose="020B0604030504040204" pitchFamily="34" charset="-120"/>
-                <a:ea typeface="微軟正黑體" panose="020B0604030504040204" pitchFamily="34" charset="-120"/>
-                <a:cs typeface="Cambria" pitchFamily="34" charset="-120"/>
-              </a:rPr>
-              <a:t>調撥單</a:t>
-            </a:r>
-          </a:p>
-        </p:txBody>
-      </p:sp>
-      <p:sp>
-        <p:nvSpPr>
           <p:cNvPr id="5" name="Shape 4">
             <a:extLst>
               <a:ext uri="{FF2B5EF4-FFF2-40B4-BE49-F238E27FC236}">
@@ -12236,36 +11862,88 @@
           </a:p>
         </p:txBody>
       </p:sp>
-      <p:pic>
-        <p:nvPicPr>
-          <p:cNvPr id="24" name="Image 0" descr="preencoded.png">
-            <a:extLst>
-              <a:ext uri="{FF2B5EF4-FFF2-40B4-BE49-F238E27FC236}">
-                <a16:creationId xmlns:a16="http://schemas.microsoft.com/office/drawing/2014/main" id="{9E77F8E2-560E-7BA9-587B-02A3F13B73C5}"/>
-              </a:ext>
-            </a:extLst>
-          </p:cNvPr>
-          <p:cNvPicPr>
-            <a:picLocks noChangeAspect="1"/>
-          </p:cNvPicPr>
-          <p:nvPr/>
-        </p:nvPicPr>
-        <p:blipFill>
-          <a:blip r:embed="rId3"/>
-          <a:stretch>
-            <a:fillRect/>
-          </a:stretch>
-        </p:blipFill>
-        <p:spPr>
-          <a:xfrm>
-            <a:off x="716287" y="687396"/>
-            <a:ext cx="384048" cy="384048"/>
-          </a:xfrm>
-          <a:prstGeom prst="rect">
-            <a:avLst/>
-          </a:prstGeom>
-        </p:spPr>
-      </p:pic>
+      <p:sp>
+        <p:nvSpPr>
+          <p:cNvPr id="21" name="Text 1">
+            <a:extLst>
+              <a:ext uri="{FF2B5EF4-FFF2-40B4-BE49-F238E27FC236}">
+                <a16:creationId xmlns:a16="http://schemas.microsoft.com/office/drawing/2014/main" id="{6843688E-5BB2-3653-C5FB-F278DC1E71E6}"/>
+              </a:ext>
+            </a:extLst>
+          </p:cNvPr>
+          <p:cNvSpPr/>
+          <p:nvPr/>
+        </p:nvSpPr>
+        <p:spPr>
+          <a:xfrm>
+            <a:off x="792328" y="515112"/>
+            <a:ext cx="9784080" cy="320040"/>
+          </a:xfrm>
+          <a:prstGeom prst="rect">
+            <a:avLst/>
+          </a:prstGeom>
+          <a:noFill/>
+          <a:ln/>
+        </p:spPr>
+        <p:txBody>
+          <a:bodyPr wrap="square" rtlCol="0" anchor="ctr"/>
+          <a:lstStyle/>
+          <a:p>
+            <a:r>
+              <a:rPr lang="en-US" altLang="zh-TW" sz="1200" b="1" kern="0" spc="100" dirty="0">
+                <a:solidFill>
+                  <a:srgbClr val="CC6600"/>
+                </a:solidFill>
+                <a:latin typeface="微軟正黑體" panose="020B0604030504040204" pitchFamily="34" charset="-120"/>
+                <a:ea typeface="微軟正黑體" panose="020B0604030504040204" pitchFamily="34" charset="-120"/>
+                <a:cs typeface="Calibri" pitchFamily="34" charset="-120"/>
+              </a:rPr>
+              <a:t>TRANSFER ORDER</a:t>
+            </a:r>
+          </a:p>
+        </p:txBody>
+      </p:sp>
+      <p:sp>
+        <p:nvSpPr>
+          <p:cNvPr id="23" name="Text 2">
+            <a:extLst>
+              <a:ext uri="{FF2B5EF4-FFF2-40B4-BE49-F238E27FC236}">
+                <a16:creationId xmlns:a16="http://schemas.microsoft.com/office/drawing/2014/main" id="{A33DFD54-F086-27F8-B8AB-312D3F1B964D}"/>
+              </a:ext>
+            </a:extLst>
+          </p:cNvPr>
+          <p:cNvSpPr/>
+          <p:nvPr/>
+        </p:nvSpPr>
+        <p:spPr>
+          <a:xfrm>
+            <a:off x="792328" y="823976"/>
+            <a:ext cx="10241280" cy="548640"/>
+          </a:xfrm>
+          <a:prstGeom prst="rect">
+            <a:avLst/>
+          </a:prstGeom>
+          <a:noFill/>
+          <a:ln/>
+        </p:spPr>
+        <p:txBody>
+          <a:bodyPr wrap="square" rtlCol="0" anchor="ctr"/>
+          <a:lstStyle/>
+          <a:p>
+            <a:r>
+              <a:rPr lang="zh-TW" altLang="en-US" sz="2800" b="1" dirty="0">
+                <a:solidFill>
+                  <a:srgbClr val="1E293B"/>
+                </a:solidFill>
+                <a:latin typeface="微軟正黑體" panose="020B0604030504040204" pitchFamily="34" charset="-120"/>
+                <a:ea typeface="微軟正黑體" panose="020B0604030504040204" pitchFamily="34" charset="-120"/>
+                <a:cs typeface="Cambria" pitchFamily="34" charset="-120"/>
+              </a:rPr>
+              <a:t>調撥單</a:t>
+            </a:r>
+          </a:p>
+        </p:txBody>
+      </p:sp>
     </p:spTree>
     <p:extLst>
       <p:ext uri="{BB962C8B-B14F-4D97-AF65-F5344CB8AC3E}">
@@ -12344,8 +12022,8 @@
         </p:nvSpPr>
         <p:spPr>
           <a:xfrm>
-            <a:off x="1432408" y="438912"/>
-            <a:ext cx="9144000" cy="320040"/>
+            <a:off x="792328" y="515112"/>
+            <a:ext cx="9784080" cy="320040"/>
           </a:xfrm>
           <a:prstGeom prst="rect">
             <a:avLst/>
@@ -12361,7 +12039,7 @@
               <a:buNone/>
             </a:pPr>
             <a:r>
-              <a:rPr lang="en-US" sz="1300" b="1" kern="0" spc="100" dirty="0">
+              <a:rPr lang="en-US" sz="1200" b="1" kern="0" spc="100" dirty="0">
                 <a:solidFill>
                   <a:srgbClr val="1C7293"/>
                 </a:solidFill>
@@ -12371,7 +12049,7 @@
               </a:rPr>
               <a:t>AGENDA</a:t>
             </a:r>
-            <a:endParaRPr lang="en-US" sz="1300" dirty="0">
+            <a:endParaRPr lang="en-US" sz="1200" dirty="0">
               <a:latin typeface="微軟正黑體" panose="020B0604030504040204" pitchFamily="34" charset="-120"/>
               <a:ea typeface="微軟正黑體" panose="020B0604030504040204" pitchFamily="34" charset="-120"/>
             </a:endParaRPr>
@@ -12392,8 +12070,8 @@
         </p:nvSpPr>
         <p:spPr>
           <a:xfrm>
-            <a:off x="1432408" y="722376"/>
-            <a:ext cx="9601200" cy="548640"/>
+            <a:off x="792328" y="823976"/>
+            <a:ext cx="10241280" cy="548640"/>
           </a:xfrm>
           <a:prstGeom prst="rect">
             <a:avLst/>
@@ -13302,94 +12980,6 @@
               <a:latin typeface="微軟正黑體" panose="020B0604030504040204" pitchFamily="34" charset="-120"/>
               <a:ea typeface="微軟正黑體" panose="020B0604030504040204" pitchFamily="34" charset="-120"/>
             </a:endParaRPr>
-          </a:p>
-        </p:txBody>
-      </p:sp>
-      <p:sp>
-        <p:nvSpPr>
-          <p:cNvPr id="3" name="Text 1">
-            <a:extLst>
-              <a:ext uri="{FF2B5EF4-FFF2-40B4-BE49-F238E27FC236}">
-                <a16:creationId xmlns:a16="http://schemas.microsoft.com/office/drawing/2014/main" id="{37B8C98F-70E3-6D70-8B9E-6EAAECD1C1EC}"/>
-              </a:ext>
-            </a:extLst>
-          </p:cNvPr>
-          <p:cNvSpPr/>
-          <p:nvPr/>
-        </p:nvSpPr>
-        <p:spPr>
-          <a:xfrm>
-            <a:off x="1432408" y="438912"/>
-            <a:ext cx="9144000" cy="320040"/>
-          </a:xfrm>
-          <a:prstGeom prst="rect">
-            <a:avLst/>
-          </a:prstGeom>
-          <a:noFill/>
-          <a:ln/>
-        </p:spPr>
-        <p:txBody>
-          <a:bodyPr wrap="square" rtlCol="0" anchor="ctr"/>
-          <a:lstStyle/>
-          <a:p>
-            <a:pPr marL="0" indent="0">
-              <a:buNone/>
-            </a:pPr>
-            <a:r>
-              <a:rPr lang="en-US" sz="1300" b="1" kern="0" spc="100" dirty="0">
-                <a:solidFill>
-                  <a:srgbClr val="CC6600"/>
-                </a:solidFill>
-                <a:latin typeface="微軟正黑體" panose="020B0604030504040204" pitchFamily="34" charset="-120"/>
-                <a:ea typeface="微軟正黑體" panose="020B0604030504040204" pitchFamily="34" charset="-120"/>
-                <a:cs typeface="Calibri" pitchFamily="34" charset="-120"/>
-              </a:rPr>
-              <a:t>TRANSFER ORDER</a:t>
-            </a:r>
-          </a:p>
-        </p:txBody>
-      </p:sp>
-      <p:sp>
-        <p:nvSpPr>
-          <p:cNvPr id="4" name="Text 2">
-            <a:extLst>
-              <a:ext uri="{FF2B5EF4-FFF2-40B4-BE49-F238E27FC236}">
-                <a16:creationId xmlns:a16="http://schemas.microsoft.com/office/drawing/2014/main" id="{9AD6B552-7172-F2FC-9829-92046F165F76}"/>
-              </a:ext>
-            </a:extLst>
-          </p:cNvPr>
-          <p:cNvSpPr/>
-          <p:nvPr/>
-        </p:nvSpPr>
-        <p:spPr>
-          <a:xfrm>
-            <a:off x="1432408" y="722376"/>
-            <a:ext cx="9601200" cy="548640"/>
-          </a:xfrm>
-          <a:prstGeom prst="rect">
-            <a:avLst/>
-          </a:prstGeom>
-          <a:noFill/>
-          <a:ln/>
-        </p:spPr>
-        <p:txBody>
-          <a:bodyPr wrap="square" rtlCol="0" anchor="ctr"/>
-          <a:lstStyle/>
-          <a:p>
-            <a:pPr marL="0" indent="0">
-              <a:buNone/>
-            </a:pPr>
-            <a:r>
-              <a:rPr lang="zh-TW" altLang="en-US" sz="2800" b="1" dirty="0">
-                <a:solidFill>
-                  <a:srgbClr val="1E293B"/>
-                </a:solidFill>
-                <a:latin typeface="微軟正黑體" panose="020B0604030504040204" pitchFamily="34" charset="-120"/>
-                <a:ea typeface="微軟正黑體" panose="020B0604030504040204" pitchFamily="34" charset="-120"/>
-                <a:cs typeface="Cambria" pitchFamily="34" charset="-120"/>
-              </a:rPr>
-              <a:t>常見防呆訊息對照表</a:t>
-            </a:r>
           </a:p>
         </p:txBody>
       </p:sp>
@@ -14954,36 +14544,110 @@
           </a:graphicData>
         </a:graphic>
       </p:graphicFrame>
-      <p:pic>
-        <p:nvPicPr>
-          <p:cNvPr id="6" name="Image 0" descr="preencoded.png">
-            <a:extLst>
-              <a:ext uri="{FF2B5EF4-FFF2-40B4-BE49-F238E27FC236}">
-                <a16:creationId xmlns:a16="http://schemas.microsoft.com/office/drawing/2014/main" id="{CAEF1E1A-3217-4108-FCE5-95B023FFF392}"/>
-              </a:ext>
-            </a:extLst>
-          </p:cNvPr>
-          <p:cNvPicPr>
-            <a:picLocks noChangeAspect="1"/>
-          </p:cNvPicPr>
-          <p:nvPr/>
-        </p:nvPicPr>
-        <p:blipFill>
-          <a:blip r:embed="rId2"/>
-          <a:stretch>
-            <a:fillRect/>
-          </a:stretch>
-        </p:blipFill>
-        <p:spPr>
-          <a:xfrm>
-            <a:off x="693524" y="656598"/>
-            <a:ext cx="420624" cy="420624"/>
-          </a:xfrm>
-          <a:prstGeom prst="rect">
-            <a:avLst/>
-          </a:prstGeom>
-        </p:spPr>
-      </p:pic>
+      <p:sp>
+        <p:nvSpPr>
+          <p:cNvPr id="8" name="Text 1">
+            <a:extLst>
+              <a:ext uri="{FF2B5EF4-FFF2-40B4-BE49-F238E27FC236}">
+                <a16:creationId xmlns:a16="http://schemas.microsoft.com/office/drawing/2014/main" id="{657577E8-16AE-F91A-6EBA-D9A3FC2D2AD2}"/>
+              </a:ext>
+            </a:extLst>
+          </p:cNvPr>
+          <p:cNvSpPr/>
+          <p:nvPr/>
+        </p:nvSpPr>
+        <p:spPr>
+          <a:xfrm>
+            <a:off x="792328" y="515112"/>
+            <a:ext cx="9784080" cy="320040"/>
+          </a:xfrm>
+          <a:prstGeom prst="rect">
+            <a:avLst/>
+          </a:prstGeom>
+          <a:noFill/>
+          <a:ln/>
+        </p:spPr>
+        <p:txBody>
+          <a:bodyPr wrap="square" rtlCol="0" anchor="ctr"/>
+          <a:lstStyle/>
+          <a:p>
+            <a:r>
+              <a:rPr lang="en-US" altLang="zh-TW" sz="1200" b="1" kern="0" spc="100" dirty="0">
+                <a:solidFill>
+                  <a:srgbClr val="CC6600"/>
+                </a:solidFill>
+                <a:latin typeface="微軟正黑體" panose="020B0604030504040204" pitchFamily="34" charset="-120"/>
+                <a:ea typeface="微軟正黑體" panose="020B0604030504040204" pitchFamily="34" charset="-120"/>
+                <a:cs typeface="Calibri" pitchFamily="34" charset="-120"/>
+              </a:rPr>
+              <a:t>ERROR</a:t>
+            </a:r>
+            <a:r>
+              <a:rPr lang="zh-TW" altLang="en-US" sz="1200" b="1" kern="0" spc="100" dirty="0">
+                <a:solidFill>
+                  <a:srgbClr val="CC6600"/>
+                </a:solidFill>
+                <a:latin typeface="微軟正黑體" panose="020B0604030504040204" pitchFamily="34" charset="-120"/>
+                <a:ea typeface="微軟正黑體" panose="020B0604030504040204" pitchFamily="34" charset="-120"/>
+                <a:cs typeface="Calibri" pitchFamily="34" charset="-120"/>
+              </a:rPr>
+              <a:t> </a:t>
+            </a:r>
+            <a:r>
+              <a:rPr lang="en-US" altLang="zh-TW" sz="1200" b="1" kern="0" spc="100" dirty="0">
+                <a:solidFill>
+                  <a:srgbClr val="CC6600"/>
+                </a:solidFill>
+                <a:latin typeface="微軟正黑體" panose="020B0604030504040204" pitchFamily="34" charset="-120"/>
+                <a:ea typeface="微軟正黑體" panose="020B0604030504040204" pitchFamily="34" charset="-120"/>
+                <a:cs typeface="Calibri" pitchFamily="34" charset="-120"/>
+              </a:rPr>
+              <a:t>MESSAGE</a:t>
+            </a:r>
+          </a:p>
+        </p:txBody>
+      </p:sp>
+      <p:sp>
+        <p:nvSpPr>
+          <p:cNvPr id="10" name="Text 2">
+            <a:extLst>
+              <a:ext uri="{FF2B5EF4-FFF2-40B4-BE49-F238E27FC236}">
+                <a16:creationId xmlns:a16="http://schemas.microsoft.com/office/drawing/2014/main" id="{A34086AA-7348-42E3-784B-8A6B09D1B791}"/>
+              </a:ext>
+            </a:extLst>
+          </p:cNvPr>
+          <p:cNvSpPr/>
+          <p:nvPr/>
+        </p:nvSpPr>
+        <p:spPr>
+          <a:xfrm>
+            <a:off x="792328" y="823976"/>
+            <a:ext cx="10241280" cy="548640"/>
+          </a:xfrm>
+          <a:prstGeom prst="rect">
+            <a:avLst/>
+          </a:prstGeom>
+          <a:noFill/>
+          <a:ln/>
+        </p:spPr>
+        <p:txBody>
+          <a:bodyPr wrap="square" rtlCol="0" anchor="ctr"/>
+          <a:lstStyle/>
+          <a:p>
+            <a:r>
+              <a:rPr lang="zh-TW" altLang="en-US" sz="2800" b="1" dirty="0">
+                <a:solidFill>
+                  <a:srgbClr val="1E293B"/>
+                </a:solidFill>
+                <a:latin typeface="微軟正黑體" panose="020B0604030504040204" pitchFamily="34" charset="-120"/>
+                <a:ea typeface="微軟正黑體" panose="020B0604030504040204" pitchFamily="34" charset="-120"/>
+                <a:cs typeface="Cambria" pitchFamily="34" charset="-120"/>
+              </a:rPr>
+              <a:t>常見防呆訊息對照表</a:t>
+            </a:r>
+          </a:p>
+        </p:txBody>
+      </p:sp>
     </p:spTree>
     <p:extLst>
       <p:ext uri="{BB962C8B-B14F-4D97-AF65-F5344CB8AC3E}">
@@ -15393,7 +15057,7 @@
             <a:avLst/>
           </a:prstGeom>
           <a:solidFill>
-            <a:srgbClr val="065A82"/>
+            <a:schemeClr val="bg1"/>
           </a:solidFill>
           <a:ln/>
         </p:spPr>
@@ -15685,7 +15349,7 @@
             <a:avLst/>
           </a:prstGeom>
           <a:solidFill>
-            <a:srgbClr val="065A82"/>
+            <a:schemeClr val="bg1"/>
           </a:solidFill>
           <a:ln/>
         </p:spPr>
@@ -15894,7 +15558,7 @@
             <a:avLst/>
           </a:prstGeom>
           <a:solidFill>
-            <a:srgbClr val="065A82"/>
+            <a:schemeClr val="bg1"/>
           </a:solidFill>
           <a:ln/>
         </p:spPr>
@@ -16103,7 +15767,7 @@
             <a:avLst/>
           </a:prstGeom>
           <a:solidFill>
-            <a:srgbClr val="065A82"/>
+            <a:schemeClr val="bg1"/>
           </a:solidFill>
           <a:ln/>
         </p:spPr>
@@ -16312,7 +15976,7 @@
             <a:avLst/>
           </a:prstGeom>
           <a:solidFill>
-            <a:srgbClr val="065A82"/>
+            <a:schemeClr val="bg1"/>
           </a:solidFill>
           <a:ln/>
         </p:spPr>
@@ -16545,7 +16209,7 @@
             <a:avLst/>
           </a:prstGeom>
           <a:solidFill>
-            <a:srgbClr val="065A82"/>
+            <a:schemeClr val="bg1"/>
           </a:solidFill>
           <a:ln/>
         </p:spPr>
@@ -16698,94 +16362,6 @@
           </a:p>
         </p:txBody>
       </p:sp>
-      <p:sp>
-        <p:nvSpPr>
-          <p:cNvPr id="35" name="Text 1">
-            <a:extLst>
-              <a:ext uri="{FF2B5EF4-FFF2-40B4-BE49-F238E27FC236}">
-                <a16:creationId xmlns:a16="http://schemas.microsoft.com/office/drawing/2014/main" id="{7A9717D5-715C-E157-36BA-200D034AEA52}"/>
-              </a:ext>
-            </a:extLst>
-          </p:cNvPr>
-          <p:cNvSpPr/>
-          <p:nvPr/>
-        </p:nvSpPr>
-        <p:spPr>
-          <a:xfrm>
-            <a:off x="1432408" y="438912"/>
-            <a:ext cx="9144000" cy="320040"/>
-          </a:xfrm>
-          <a:prstGeom prst="rect">
-            <a:avLst/>
-          </a:prstGeom>
-          <a:noFill/>
-          <a:ln/>
-        </p:spPr>
-        <p:txBody>
-          <a:bodyPr wrap="square" rtlCol="0" anchor="ctr"/>
-          <a:lstStyle/>
-          <a:p>
-            <a:pPr marL="0" indent="0">
-              <a:buNone/>
-            </a:pPr>
-            <a:r>
-              <a:rPr lang="en-US" sz="1300" b="1" kern="0" spc="100" dirty="0">
-                <a:solidFill>
-                  <a:srgbClr val="1C7293"/>
-                </a:solidFill>
-                <a:latin typeface="微軟正黑體" panose="020B0604030504040204" pitchFamily="34" charset="-120"/>
-                <a:ea typeface="微軟正黑體" panose="020B0604030504040204" pitchFamily="34" charset="-120"/>
-                <a:cs typeface="Calibri" pitchFamily="34" charset="-120"/>
-              </a:rPr>
-              <a:t>SYSTEM OVERVIEW</a:t>
-            </a:r>
-          </a:p>
-        </p:txBody>
-      </p:sp>
-      <p:sp>
-        <p:nvSpPr>
-          <p:cNvPr id="36" name="Text 2">
-            <a:extLst>
-              <a:ext uri="{FF2B5EF4-FFF2-40B4-BE49-F238E27FC236}">
-                <a16:creationId xmlns:a16="http://schemas.microsoft.com/office/drawing/2014/main" id="{D03A6ACC-6BF5-FBA2-850B-CDD27730584C}"/>
-              </a:ext>
-            </a:extLst>
-          </p:cNvPr>
-          <p:cNvSpPr/>
-          <p:nvPr/>
-        </p:nvSpPr>
-        <p:spPr>
-          <a:xfrm>
-            <a:off x="1432408" y="722376"/>
-            <a:ext cx="9601200" cy="548640"/>
-          </a:xfrm>
-          <a:prstGeom prst="rect">
-            <a:avLst/>
-          </a:prstGeom>
-          <a:noFill/>
-          <a:ln/>
-        </p:spPr>
-        <p:txBody>
-          <a:bodyPr wrap="square" rtlCol="0" anchor="ctr"/>
-          <a:lstStyle/>
-          <a:p>
-            <a:pPr marL="0" indent="0">
-              <a:buNone/>
-            </a:pPr>
-            <a:r>
-              <a:rPr lang="zh-TW" altLang="en-US" sz="2800" b="1" dirty="0">
-                <a:solidFill>
-                  <a:srgbClr val="1E293B"/>
-                </a:solidFill>
-                <a:latin typeface="微軟正黑體" panose="020B0604030504040204" pitchFamily="34" charset="-120"/>
-                <a:ea typeface="微軟正黑體" panose="020B0604030504040204" pitchFamily="34" charset="-120"/>
-                <a:cs typeface="Cambria" pitchFamily="34" charset="-120"/>
-              </a:rPr>
-              <a:t>應用程式架構總覽</a:t>
-            </a:r>
-          </a:p>
-        </p:txBody>
-      </p:sp>
       <p:pic>
         <p:nvPicPr>
           <p:cNvPr id="37" name="Image 0" descr="preencoded.png">
@@ -16966,6 +16542,88 @@
           </a:prstGeom>
         </p:spPr>
       </p:pic>
+      <p:sp>
+        <p:nvSpPr>
+          <p:cNvPr id="4" name="Text 1">
+            <a:extLst>
+              <a:ext uri="{FF2B5EF4-FFF2-40B4-BE49-F238E27FC236}">
+                <a16:creationId xmlns:a16="http://schemas.microsoft.com/office/drawing/2014/main" id="{EF87AC90-2BBC-CDEC-D5E5-A509157EF596}"/>
+              </a:ext>
+            </a:extLst>
+          </p:cNvPr>
+          <p:cNvSpPr/>
+          <p:nvPr/>
+        </p:nvSpPr>
+        <p:spPr>
+          <a:xfrm>
+            <a:off x="792328" y="515112"/>
+            <a:ext cx="9784080" cy="320040"/>
+          </a:xfrm>
+          <a:prstGeom prst="rect">
+            <a:avLst/>
+          </a:prstGeom>
+          <a:noFill/>
+          <a:ln/>
+        </p:spPr>
+        <p:txBody>
+          <a:bodyPr wrap="square" rtlCol="0" anchor="ctr"/>
+          <a:lstStyle/>
+          <a:p>
+            <a:r>
+              <a:rPr lang="en-US" altLang="zh-TW" sz="1200" b="1" kern="0" spc="100" dirty="0">
+                <a:solidFill>
+                  <a:srgbClr val="1C7293"/>
+                </a:solidFill>
+                <a:latin typeface="微軟正黑體" panose="020B0604030504040204" pitchFamily="34" charset="-120"/>
+                <a:ea typeface="微軟正黑體" panose="020B0604030504040204" pitchFamily="34" charset="-120"/>
+                <a:cs typeface="Calibri" pitchFamily="34" charset="-120"/>
+              </a:rPr>
+              <a:t>SYSTEM OVERVIEW</a:t>
+            </a:r>
+          </a:p>
+        </p:txBody>
+      </p:sp>
+      <p:sp>
+        <p:nvSpPr>
+          <p:cNvPr id="44" name="Text 2">
+            <a:extLst>
+              <a:ext uri="{FF2B5EF4-FFF2-40B4-BE49-F238E27FC236}">
+                <a16:creationId xmlns:a16="http://schemas.microsoft.com/office/drawing/2014/main" id="{667B91CD-19DE-8241-A80D-7239784B122B}"/>
+              </a:ext>
+            </a:extLst>
+          </p:cNvPr>
+          <p:cNvSpPr/>
+          <p:nvPr/>
+        </p:nvSpPr>
+        <p:spPr>
+          <a:xfrm>
+            <a:off x="792328" y="823976"/>
+            <a:ext cx="10241280" cy="548640"/>
+          </a:xfrm>
+          <a:prstGeom prst="rect">
+            <a:avLst/>
+          </a:prstGeom>
+          <a:noFill/>
+          <a:ln/>
+        </p:spPr>
+        <p:txBody>
+          <a:bodyPr wrap="square" rtlCol="0" anchor="ctr"/>
+          <a:lstStyle/>
+          <a:p>
+            <a:r>
+              <a:rPr lang="zh-TW" altLang="en-US" sz="2800" b="1" dirty="0">
+                <a:solidFill>
+                  <a:srgbClr val="1E293B"/>
+                </a:solidFill>
+                <a:latin typeface="微軟正黑體" panose="020B0604030504040204" pitchFamily="34" charset="-120"/>
+                <a:ea typeface="微軟正黑體" panose="020B0604030504040204" pitchFamily="34" charset="-120"/>
+                <a:cs typeface="Cambria" pitchFamily="34" charset="-120"/>
+              </a:rPr>
+              <a:t>應用程式架構總覽</a:t>
+            </a:r>
+          </a:p>
+        </p:txBody>
+      </p:sp>
     </p:spTree>
     <p:extLst>
       <p:ext uri="{BB962C8B-B14F-4D97-AF65-F5344CB8AC3E}">
@@ -17265,94 +16923,6 @@
               <a:t>5</a:t>
             </a:fld>
             <a:endParaRPr lang="zh-TW" altLang="en-US"/>
-          </a:p>
-        </p:txBody>
-      </p:sp>
-      <p:sp>
-        <p:nvSpPr>
-          <p:cNvPr id="8" name="Text 1">
-            <a:extLst>
-              <a:ext uri="{FF2B5EF4-FFF2-40B4-BE49-F238E27FC236}">
-                <a16:creationId xmlns:a16="http://schemas.microsoft.com/office/drawing/2014/main" id="{D110CF87-D6E3-6276-E107-B33D0FFC0BE4}"/>
-              </a:ext>
-            </a:extLst>
-          </p:cNvPr>
-          <p:cNvSpPr/>
-          <p:nvPr/>
-        </p:nvSpPr>
-        <p:spPr>
-          <a:xfrm>
-            <a:off x="1432408" y="438912"/>
-            <a:ext cx="9144000" cy="320040"/>
-          </a:xfrm>
-          <a:prstGeom prst="rect">
-            <a:avLst/>
-          </a:prstGeom>
-          <a:noFill/>
-          <a:ln/>
-        </p:spPr>
-        <p:txBody>
-          <a:bodyPr wrap="square" rtlCol="0" anchor="ctr"/>
-          <a:lstStyle/>
-          <a:p>
-            <a:pPr marL="0" indent="0">
-              <a:buNone/>
-            </a:pPr>
-            <a:r>
-              <a:rPr lang="en-US" sz="1300" b="1" kern="0" spc="100" dirty="0">
-                <a:solidFill>
-                  <a:srgbClr val="1C7293"/>
-                </a:solidFill>
-                <a:latin typeface="微軟正黑體" panose="020B0604030504040204" pitchFamily="34" charset="-120"/>
-                <a:ea typeface="微軟正黑體" panose="020B0604030504040204" pitchFamily="34" charset="-120"/>
-                <a:cs typeface="Calibri" pitchFamily="34" charset="-120"/>
-              </a:rPr>
-              <a:t>PLUGIN</a:t>
-            </a:r>
-          </a:p>
-        </p:txBody>
-      </p:sp>
-      <p:sp>
-        <p:nvSpPr>
-          <p:cNvPr id="9" name="Text 2">
-            <a:extLst>
-              <a:ext uri="{FF2B5EF4-FFF2-40B4-BE49-F238E27FC236}">
-                <a16:creationId xmlns:a16="http://schemas.microsoft.com/office/drawing/2014/main" id="{DABB57C1-636E-F3B1-7F05-5B4D3F6C23D8}"/>
-              </a:ext>
-            </a:extLst>
-          </p:cNvPr>
-          <p:cNvSpPr/>
-          <p:nvPr/>
-        </p:nvSpPr>
-        <p:spPr>
-          <a:xfrm>
-            <a:off x="1432408" y="722376"/>
-            <a:ext cx="9601200" cy="548640"/>
-          </a:xfrm>
-          <a:prstGeom prst="rect">
-            <a:avLst/>
-          </a:prstGeom>
-          <a:noFill/>
-          <a:ln/>
-        </p:spPr>
-        <p:txBody>
-          <a:bodyPr wrap="square" rtlCol="0" anchor="ctr"/>
-          <a:lstStyle/>
-          <a:p>
-            <a:pPr marL="0" indent="0">
-              <a:buNone/>
-            </a:pPr>
-            <a:r>
-              <a:rPr lang="zh-TW" altLang="en-US" sz="2800" b="1" dirty="0">
-                <a:solidFill>
-                  <a:srgbClr val="1E293B"/>
-                </a:solidFill>
-                <a:latin typeface="微軟正黑體" panose="020B0604030504040204" pitchFamily="34" charset="-120"/>
-                <a:ea typeface="微軟正黑體" panose="020B0604030504040204" pitchFamily="34" charset="-120"/>
-                <a:cs typeface="Cambria" pitchFamily="34" charset="-120"/>
-              </a:rPr>
-              <a:t>外掛設定</a:t>
-            </a:r>
           </a:p>
         </p:txBody>
       </p:sp>
@@ -18507,6 +18077,88 @@
           </a:p>
         </p:txBody>
       </p:sp>
+      <p:sp>
+        <p:nvSpPr>
+          <p:cNvPr id="4" name="Text 1">
+            <a:extLst>
+              <a:ext uri="{FF2B5EF4-FFF2-40B4-BE49-F238E27FC236}">
+                <a16:creationId xmlns:a16="http://schemas.microsoft.com/office/drawing/2014/main" id="{C9E4BEE8-6452-3197-CB27-2D0CFCF11C88}"/>
+              </a:ext>
+            </a:extLst>
+          </p:cNvPr>
+          <p:cNvSpPr/>
+          <p:nvPr/>
+        </p:nvSpPr>
+        <p:spPr>
+          <a:xfrm>
+            <a:off x="792328" y="515112"/>
+            <a:ext cx="9784080" cy="320040"/>
+          </a:xfrm>
+          <a:prstGeom prst="rect">
+            <a:avLst/>
+          </a:prstGeom>
+          <a:noFill/>
+          <a:ln/>
+        </p:spPr>
+        <p:txBody>
+          <a:bodyPr wrap="square" rtlCol="0" anchor="ctr"/>
+          <a:lstStyle/>
+          <a:p>
+            <a:r>
+              <a:rPr lang="en-US" altLang="zh-TW" sz="1200" b="1" kern="0" spc="100" dirty="0">
+                <a:solidFill>
+                  <a:srgbClr val="1C7293"/>
+                </a:solidFill>
+                <a:latin typeface="微軟正黑體" panose="020B0604030504040204" pitchFamily="34" charset="-120"/>
+                <a:ea typeface="微軟正黑體" panose="020B0604030504040204" pitchFamily="34" charset="-120"/>
+                <a:cs typeface="Calibri" pitchFamily="34" charset="-120"/>
+              </a:rPr>
+              <a:t>PLUGIN</a:t>
+            </a:r>
+          </a:p>
+        </p:txBody>
+      </p:sp>
+      <p:sp>
+        <p:nvSpPr>
+          <p:cNvPr id="6" name="Text 2">
+            <a:extLst>
+              <a:ext uri="{FF2B5EF4-FFF2-40B4-BE49-F238E27FC236}">
+                <a16:creationId xmlns:a16="http://schemas.microsoft.com/office/drawing/2014/main" id="{49EEB442-1286-572A-CC02-51C84452D32D}"/>
+              </a:ext>
+            </a:extLst>
+          </p:cNvPr>
+          <p:cNvSpPr/>
+          <p:nvPr/>
+        </p:nvSpPr>
+        <p:spPr>
+          <a:xfrm>
+            <a:off x="792328" y="823976"/>
+            <a:ext cx="10241280" cy="548640"/>
+          </a:xfrm>
+          <a:prstGeom prst="rect">
+            <a:avLst/>
+          </a:prstGeom>
+          <a:noFill/>
+          <a:ln/>
+        </p:spPr>
+        <p:txBody>
+          <a:bodyPr wrap="square" rtlCol="0" anchor="ctr"/>
+          <a:lstStyle/>
+          <a:p>
+            <a:r>
+              <a:rPr lang="zh-TW" altLang="en-US" sz="2800" b="1" dirty="0">
+                <a:solidFill>
+                  <a:srgbClr val="1E293B"/>
+                </a:solidFill>
+                <a:latin typeface="微軟正黑體" panose="020B0604030504040204" pitchFamily="34" charset="-120"/>
+                <a:ea typeface="微軟正黑體" panose="020B0604030504040204" pitchFamily="34" charset="-120"/>
+                <a:cs typeface="Cambria" pitchFamily="34" charset="-120"/>
+              </a:rPr>
+              <a:t>外掛設定</a:t>
+            </a:r>
+          </a:p>
+        </p:txBody>
+      </p:sp>
     </p:spTree>
     <p:extLst>
       <p:ext uri="{BB962C8B-B14F-4D97-AF65-F5344CB8AC3E}">
@@ -18572,105 +18224,6 @@
       </p:sp>
       <p:sp>
         <p:nvSpPr>
-          <p:cNvPr id="3" name="Text 1">
-            <a:extLst>
-              <a:ext uri="{FF2B5EF4-FFF2-40B4-BE49-F238E27FC236}">
-                <a16:creationId xmlns:a16="http://schemas.microsoft.com/office/drawing/2014/main" id="{E2BA44B4-1793-DD54-FDF6-3960F251F3C9}"/>
-              </a:ext>
-            </a:extLst>
-          </p:cNvPr>
-          <p:cNvSpPr/>
-          <p:nvPr/>
-        </p:nvSpPr>
-        <p:spPr>
-          <a:xfrm>
-            <a:off x="1432408" y="438912"/>
-            <a:ext cx="9144000" cy="320040"/>
-          </a:xfrm>
-          <a:prstGeom prst="rect">
-            <a:avLst/>
-          </a:prstGeom>
-          <a:noFill/>
-          <a:ln/>
-        </p:spPr>
-        <p:txBody>
-          <a:bodyPr wrap="square" rtlCol="0" anchor="ctr"/>
-          <a:lstStyle/>
-          <a:p>
-            <a:pPr marL="0" indent="0">
-              <a:buNone/>
-            </a:pPr>
-            <a:r>
-              <a:rPr lang="en-US" sz="1300" b="1" kern="0" spc="100" dirty="0">
-                <a:solidFill>
-                  <a:srgbClr val="1C7293"/>
-                </a:solidFill>
-                <a:latin typeface="微軟正黑體" panose="020B0604030504040204" pitchFamily="34" charset="-120"/>
-                <a:ea typeface="微軟正黑體" panose="020B0604030504040204" pitchFamily="34" charset="-120"/>
-                <a:cs typeface="Calibri" pitchFamily="34" charset="-120"/>
-              </a:rPr>
-              <a:t>ERP AUTO NUMBERING PLUGIN</a:t>
-            </a:r>
-          </a:p>
-        </p:txBody>
-      </p:sp>
-      <p:sp>
-        <p:nvSpPr>
-          <p:cNvPr id="4" name="Text 2">
-            <a:extLst>
-              <a:ext uri="{FF2B5EF4-FFF2-40B4-BE49-F238E27FC236}">
-                <a16:creationId xmlns:a16="http://schemas.microsoft.com/office/drawing/2014/main" id="{F96514F0-FE3E-61F8-9671-A76647617EB6}"/>
-              </a:ext>
-            </a:extLst>
-          </p:cNvPr>
-          <p:cNvSpPr/>
-          <p:nvPr/>
-        </p:nvSpPr>
-        <p:spPr>
-          <a:xfrm>
-            <a:off x="1432408" y="722376"/>
-            <a:ext cx="9601200" cy="548640"/>
-          </a:xfrm>
-          <a:prstGeom prst="rect">
-            <a:avLst/>
-          </a:prstGeom>
-          <a:noFill/>
-          <a:ln/>
-        </p:spPr>
-        <p:txBody>
-          <a:bodyPr wrap="square" rtlCol="0" anchor="ctr"/>
-          <a:lstStyle/>
-          <a:p>
-            <a:pPr marL="0" indent="0">
-              <a:buNone/>
-            </a:pPr>
-            <a:r>
-              <a:rPr lang="en-US" altLang="zh-TW" sz="2800" b="1" dirty="0">
-                <a:solidFill>
-                  <a:srgbClr val="1E293B"/>
-                </a:solidFill>
-                <a:latin typeface="微軟正黑體" panose="020B0604030504040204" pitchFamily="34" charset="-120"/>
-                <a:ea typeface="微軟正黑體" panose="020B0604030504040204" pitchFamily="34" charset="-120"/>
-                <a:cs typeface="Cambria" pitchFamily="34" charset="-120"/>
-              </a:rPr>
-              <a:t>ERP </a:t>
-            </a:r>
-            <a:r>
-              <a:rPr lang="zh-TW" altLang="en-US" sz="2800" b="1" dirty="0">
-                <a:solidFill>
-                  <a:srgbClr val="1E293B"/>
-                </a:solidFill>
-                <a:latin typeface="微軟正黑體" panose="020B0604030504040204" pitchFamily="34" charset="-120"/>
-                <a:ea typeface="微軟正黑體" panose="020B0604030504040204" pitchFamily="34" charset="-120"/>
-                <a:cs typeface="Cambria" pitchFamily="34" charset="-120"/>
-              </a:rPr>
-              <a:t>自動編號外掛</a:t>
-            </a:r>
-          </a:p>
-        </p:txBody>
-      </p:sp>
-      <p:sp>
-        <p:nvSpPr>
           <p:cNvPr id="5" name="Shape 4">
             <a:extLst>
               <a:ext uri="{FF2B5EF4-FFF2-40B4-BE49-F238E27FC236}">
@@ -19525,36 +19078,99 @@
           </a:p>
         </p:txBody>
       </p:sp>
-      <p:pic>
-        <p:nvPicPr>
-          <p:cNvPr id="23" name="Image 0" descr="preencoded.png">
-            <a:extLst>
-              <a:ext uri="{FF2B5EF4-FFF2-40B4-BE49-F238E27FC236}">
-                <a16:creationId xmlns:a16="http://schemas.microsoft.com/office/drawing/2014/main" id="{90804188-BBC4-E7EA-55E9-85AA12D2942F}"/>
-              </a:ext>
-            </a:extLst>
-          </p:cNvPr>
-          <p:cNvPicPr>
-            <a:picLocks noChangeAspect="1"/>
-          </p:cNvPicPr>
-          <p:nvPr/>
-        </p:nvPicPr>
-        <p:blipFill>
-          <a:blip r:embed="rId2"/>
-          <a:stretch>
-            <a:fillRect/>
-          </a:stretch>
-        </p:blipFill>
-        <p:spPr>
-          <a:xfrm>
-            <a:off x="693524" y="656598"/>
-            <a:ext cx="420624" cy="420624"/>
-          </a:xfrm>
-          <a:prstGeom prst="rect">
-            <a:avLst/>
-          </a:prstGeom>
-        </p:spPr>
-      </p:pic>
+      <p:sp>
+        <p:nvSpPr>
+          <p:cNvPr id="25" name="Text 1">
+            <a:extLst>
+              <a:ext uri="{FF2B5EF4-FFF2-40B4-BE49-F238E27FC236}">
+                <a16:creationId xmlns:a16="http://schemas.microsoft.com/office/drawing/2014/main" id="{CCBE6541-AD77-8ED1-33D3-6B23C9C342A7}"/>
+              </a:ext>
+            </a:extLst>
+          </p:cNvPr>
+          <p:cNvSpPr/>
+          <p:nvPr/>
+        </p:nvSpPr>
+        <p:spPr>
+          <a:xfrm>
+            <a:off x="792328" y="515112"/>
+            <a:ext cx="9784080" cy="320040"/>
+          </a:xfrm>
+          <a:prstGeom prst="rect">
+            <a:avLst/>
+          </a:prstGeom>
+          <a:noFill/>
+          <a:ln/>
+        </p:spPr>
+        <p:txBody>
+          <a:bodyPr wrap="square" rtlCol="0" anchor="ctr"/>
+          <a:lstStyle/>
+          <a:p>
+            <a:r>
+              <a:rPr lang="en-US" altLang="zh-TW" sz="1200" b="1" kern="0" spc="100" dirty="0">
+                <a:solidFill>
+                  <a:srgbClr val="1C7293"/>
+                </a:solidFill>
+                <a:latin typeface="微軟正黑體" panose="020B0604030504040204" pitchFamily="34" charset="-120"/>
+                <a:ea typeface="微軟正黑體" panose="020B0604030504040204" pitchFamily="34" charset="-120"/>
+                <a:cs typeface="Calibri" pitchFamily="34" charset="-120"/>
+              </a:rPr>
+              <a:t>ERP AUTO NUMBERING PLUGIN</a:t>
+            </a:r>
+          </a:p>
+        </p:txBody>
+      </p:sp>
+      <p:sp>
+        <p:nvSpPr>
+          <p:cNvPr id="27" name="Text 2">
+            <a:extLst>
+              <a:ext uri="{FF2B5EF4-FFF2-40B4-BE49-F238E27FC236}">
+                <a16:creationId xmlns:a16="http://schemas.microsoft.com/office/drawing/2014/main" id="{DA7D3BB4-8505-EEBE-107C-6485F8B47928}"/>
+              </a:ext>
+            </a:extLst>
+          </p:cNvPr>
+          <p:cNvSpPr/>
+          <p:nvPr/>
+        </p:nvSpPr>
+        <p:spPr>
+          <a:xfrm>
+            <a:off x="792328" y="823976"/>
+            <a:ext cx="10241280" cy="548640"/>
+          </a:xfrm>
+          <a:prstGeom prst="rect">
+            <a:avLst/>
+          </a:prstGeom>
+          <a:noFill/>
+          <a:ln/>
+        </p:spPr>
+        <p:txBody>
+          <a:bodyPr wrap="square" rtlCol="0" anchor="ctr"/>
+          <a:lstStyle/>
+          <a:p>
+            <a:r>
+              <a:rPr lang="en-US" altLang="zh-TW" sz="2800" b="1" dirty="0">
+                <a:solidFill>
+                  <a:srgbClr val="1E293B"/>
+                </a:solidFill>
+                <a:latin typeface="微軟正黑體" panose="020B0604030504040204" pitchFamily="34" charset="-120"/>
+                <a:ea typeface="微軟正黑體" panose="020B0604030504040204" pitchFamily="34" charset="-120"/>
+                <a:cs typeface="Cambria" pitchFamily="34" charset="-120"/>
+              </a:rPr>
+              <a:t>ERP </a:t>
+            </a:r>
+            <a:r>
+              <a:rPr lang="zh-TW" altLang="en-US" sz="2800" b="1" dirty="0">
+                <a:solidFill>
+                  <a:srgbClr val="1E293B"/>
+                </a:solidFill>
+                <a:latin typeface="微軟正黑體" panose="020B0604030504040204" pitchFamily="34" charset="-120"/>
+                <a:ea typeface="微軟正黑體" panose="020B0604030504040204" pitchFamily="34" charset="-120"/>
+                <a:cs typeface="Cambria" pitchFamily="34" charset="-120"/>
+              </a:rPr>
+              <a:t>自動編號外掛</a:t>
+            </a:r>
+          </a:p>
+        </p:txBody>
+      </p:sp>
     </p:spTree>
     <p:extLst>
       <p:ext uri="{BB962C8B-B14F-4D97-AF65-F5344CB8AC3E}">
@@ -19617,135 +19233,6 @@
       </p:sp>
       <p:sp>
         <p:nvSpPr>
-          <p:cNvPr id="3" name="Text 1">
-            <a:extLst>
-              <a:ext uri="{FF2B5EF4-FFF2-40B4-BE49-F238E27FC236}">
-                <a16:creationId xmlns:a16="http://schemas.microsoft.com/office/drawing/2014/main" id="{7ED65ED4-2FC3-A486-F2C0-E30908BA8208}"/>
-              </a:ext>
-            </a:extLst>
-          </p:cNvPr>
-          <p:cNvSpPr/>
-          <p:nvPr/>
-        </p:nvSpPr>
-        <p:spPr>
-          <a:xfrm>
-            <a:off x="1432408" y="438912"/>
-            <a:ext cx="9144000" cy="320040"/>
-          </a:xfrm>
-          <a:prstGeom prst="rect">
-            <a:avLst/>
-          </a:prstGeom>
-          <a:noFill/>
-          <a:ln/>
-        </p:spPr>
-        <p:txBody>
-          <a:bodyPr wrap="square" rtlCol="0" anchor="ctr"/>
-          <a:lstStyle/>
-          <a:p>
-            <a:pPr marL="0" indent="0">
-              <a:buNone/>
-            </a:pPr>
-            <a:r>
-              <a:rPr lang="en-US" sz="1300" b="1" kern="0" spc="100" dirty="0">
-                <a:solidFill>
-                  <a:srgbClr val="1C7293"/>
-                </a:solidFill>
-                <a:latin typeface="微軟正黑體" panose="020B0604030504040204" pitchFamily="34" charset="-120"/>
-                <a:ea typeface="微軟正黑體" panose="020B0604030504040204" pitchFamily="34" charset="-120"/>
-                <a:cs typeface="Calibri" pitchFamily="34" charset="-120"/>
-              </a:rPr>
-              <a:t>ERP BARCODE SCANNER PLUGIN</a:t>
-            </a:r>
-          </a:p>
-        </p:txBody>
-      </p:sp>
-      <p:sp>
-        <p:nvSpPr>
-          <p:cNvPr id="4" name="Text 2">
-            <a:extLst>
-              <a:ext uri="{FF2B5EF4-FFF2-40B4-BE49-F238E27FC236}">
-                <a16:creationId xmlns:a16="http://schemas.microsoft.com/office/drawing/2014/main" id="{A65DDF87-31EF-9E63-E661-B264A0813263}"/>
-              </a:ext>
-            </a:extLst>
-          </p:cNvPr>
-          <p:cNvSpPr/>
-          <p:nvPr/>
-        </p:nvSpPr>
-        <p:spPr>
-          <a:xfrm>
-            <a:off x="1432408" y="722376"/>
-            <a:ext cx="9601200" cy="548640"/>
-          </a:xfrm>
-          <a:prstGeom prst="rect">
-            <a:avLst/>
-          </a:prstGeom>
-          <a:noFill/>
-          <a:ln/>
-        </p:spPr>
-        <p:txBody>
-          <a:bodyPr wrap="square" rtlCol="0" anchor="ctr"/>
-          <a:lstStyle/>
-          <a:p>
-            <a:pPr marL="0" indent="0">
-              <a:buNone/>
-            </a:pPr>
-            <a:r>
-              <a:rPr lang="en-US" altLang="zh-TW" sz="2800" b="1" dirty="0">
-                <a:solidFill>
-                  <a:srgbClr val="1E293B"/>
-                </a:solidFill>
-                <a:latin typeface="微軟正黑體" panose="020B0604030504040204" pitchFamily="34" charset="-120"/>
-                <a:ea typeface="微軟正黑體" panose="020B0604030504040204" pitchFamily="34" charset="-120"/>
-                <a:cs typeface="Cambria" pitchFamily="34" charset="-120"/>
-              </a:rPr>
-              <a:t>ERP </a:t>
-            </a:r>
-            <a:r>
-              <a:rPr lang="zh-TW" altLang="en-US" sz="2800" b="1" dirty="0">
-                <a:solidFill>
-                  <a:srgbClr val="1E293B"/>
-                </a:solidFill>
-                <a:latin typeface="微軟正黑體" panose="020B0604030504040204" pitchFamily="34" charset="-120"/>
-                <a:ea typeface="微軟正黑體" panose="020B0604030504040204" pitchFamily="34" charset="-120"/>
-                <a:cs typeface="Cambria" pitchFamily="34" charset="-120"/>
-              </a:rPr>
-              <a:t>進出貨條碼掃描外掛</a:t>
-            </a:r>
-          </a:p>
-        </p:txBody>
-      </p:sp>
-      <p:pic>
-        <p:nvPicPr>
-          <p:cNvPr id="5" name="Image 0" descr="preencoded.png">
-            <a:extLst>
-              <a:ext uri="{FF2B5EF4-FFF2-40B4-BE49-F238E27FC236}">
-                <a16:creationId xmlns:a16="http://schemas.microsoft.com/office/drawing/2014/main" id="{8EB1F682-0A84-7F39-C944-B6C7E695B770}"/>
-              </a:ext>
-            </a:extLst>
-          </p:cNvPr>
-          <p:cNvPicPr>
-            <a:picLocks noChangeAspect="1"/>
-          </p:cNvPicPr>
-          <p:nvPr/>
-        </p:nvPicPr>
-        <p:blipFill>
-          <a:blip r:embed="rId2"/>
-          <a:stretch>
-            <a:fillRect/>
-          </a:stretch>
-        </p:blipFill>
-        <p:spPr>
-          <a:xfrm>
-            <a:off x="734750" y="692880"/>
-            <a:ext cx="370434" cy="370434"/>
-          </a:xfrm>
-          <a:prstGeom prst="rect">
-            <a:avLst/>
-          </a:prstGeom>
-        </p:spPr>
-      </p:pic>
-      <p:sp>
-        <p:nvSpPr>
           <p:cNvPr id="14" name="Text 4">
             <a:extLst>
               <a:ext uri="{FF2B5EF4-FFF2-40B4-BE49-F238E27FC236}">
@@ -21021,6 +20508,99 @@
               <a:latin typeface="微軟正黑體" panose="020B0604030504040204" pitchFamily="34" charset="-120"/>
               <a:ea typeface="微軟正黑體" panose="020B0604030504040204" pitchFamily="34" charset="-120"/>
             </a:endParaRPr>
+          </a:p>
+        </p:txBody>
+      </p:sp>
+      <p:sp>
+        <p:nvSpPr>
+          <p:cNvPr id="7" name="Text 1">
+            <a:extLst>
+              <a:ext uri="{FF2B5EF4-FFF2-40B4-BE49-F238E27FC236}">
+                <a16:creationId xmlns:a16="http://schemas.microsoft.com/office/drawing/2014/main" id="{5B4E7D7D-5D7C-89DC-D6B5-0238368F1640}"/>
+              </a:ext>
+            </a:extLst>
+          </p:cNvPr>
+          <p:cNvSpPr/>
+          <p:nvPr/>
+        </p:nvSpPr>
+        <p:spPr>
+          <a:xfrm>
+            <a:off x="792328" y="515112"/>
+            <a:ext cx="9784080" cy="320040"/>
+          </a:xfrm>
+          <a:prstGeom prst="rect">
+            <a:avLst/>
+          </a:prstGeom>
+          <a:noFill/>
+          <a:ln/>
+        </p:spPr>
+        <p:txBody>
+          <a:bodyPr wrap="square" rtlCol="0" anchor="ctr"/>
+          <a:lstStyle/>
+          <a:p>
+            <a:r>
+              <a:rPr lang="en-US" altLang="zh-TW" sz="1200" b="1" kern="0" spc="100" dirty="0">
+                <a:solidFill>
+                  <a:srgbClr val="1C7293"/>
+                </a:solidFill>
+                <a:latin typeface="微軟正黑體" panose="020B0604030504040204" pitchFamily="34" charset="-120"/>
+                <a:ea typeface="微軟正黑體" panose="020B0604030504040204" pitchFamily="34" charset="-120"/>
+                <a:cs typeface="Calibri" pitchFamily="34" charset="-120"/>
+              </a:rPr>
+              <a:t>ERP BARCODE SCANNER PLUGIN</a:t>
+            </a:r>
+          </a:p>
+        </p:txBody>
+      </p:sp>
+      <p:sp>
+        <p:nvSpPr>
+          <p:cNvPr id="9" name="Text 2">
+            <a:extLst>
+              <a:ext uri="{FF2B5EF4-FFF2-40B4-BE49-F238E27FC236}">
+                <a16:creationId xmlns:a16="http://schemas.microsoft.com/office/drawing/2014/main" id="{0B5A8030-C1FC-F391-DCF9-E027D784AC6B}"/>
+              </a:ext>
+            </a:extLst>
+          </p:cNvPr>
+          <p:cNvSpPr/>
+          <p:nvPr/>
+        </p:nvSpPr>
+        <p:spPr>
+          <a:xfrm>
+            <a:off x="792328" y="823976"/>
+            <a:ext cx="10241280" cy="548640"/>
+          </a:xfrm>
+          <a:prstGeom prst="rect">
+            <a:avLst/>
+          </a:prstGeom>
+          <a:noFill/>
+          <a:ln/>
+        </p:spPr>
+        <p:txBody>
+          <a:bodyPr wrap="square" rtlCol="0" anchor="ctr"/>
+          <a:lstStyle/>
+          <a:p>
+            <a:r>
+              <a:rPr lang="en-US" altLang="zh-TW" sz="2800" b="1" dirty="0">
+                <a:solidFill>
+                  <a:srgbClr val="1E293B"/>
+                </a:solidFill>
+                <a:latin typeface="微軟正黑體" panose="020B0604030504040204" pitchFamily="34" charset="-120"/>
+                <a:ea typeface="微軟正黑體" panose="020B0604030504040204" pitchFamily="34" charset="-120"/>
+                <a:cs typeface="Cambria" pitchFamily="34" charset="-120"/>
+              </a:rPr>
+              <a:t>ERP </a:t>
+            </a:r>
+            <a:r>
+              <a:rPr lang="zh-TW" altLang="en-US" sz="2800" b="1" dirty="0">
+                <a:solidFill>
+                  <a:srgbClr val="1E293B"/>
+                </a:solidFill>
+                <a:latin typeface="微軟正黑體" panose="020B0604030504040204" pitchFamily="34" charset="-120"/>
+                <a:ea typeface="微軟正黑體" panose="020B0604030504040204" pitchFamily="34" charset="-120"/>
+                <a:cs typeface="Cambria" pitchFamily="34" charset="-120"/>
+              </a:rPr>
+              <a:t>進出貨條碼掃描外掛</a:t>
+            </a:r>
           </a:p>
         </p:txBody>
       </p:sp>
@@ -21086,116 +20666,6 @@
       </p:sp>
       <p:sp>
         <p:nvSpPr>
-          <p:cNvPr id="3" name="Text 1">
-            <a:extLst>
-              <a:ext uri="{FF2B5EF4-FFF2-40B4-BE49-F238E27FC236}">
-                <a16:creationId xmlns:a16="http://schemas.microsoft.com/office/drawing/2014/main" id="{3E94CA82-104D-49D0-917F-959ABB1CA934}"/>
-              </a:ext>
-            </a:extLst>
-          </p:cNvPr>
-          <p:cNvSpPr/>
-          <p:nvPr/>
-        </p:nvSpPr>
-        <p:spPr>
-          <a:xfrm>
-            <a:off x="1432408" y="438912"/>
-            <a:ext cx="9144000" cy="320040"/>
-          </a:xfrm>
-          <a:prstGeom prst="rect">
-            <a:avLst/>
-          </a:prstGeom>
-          <a:noFill/>
-          <a:ln/>
-        </p:spPr>
-        <p:txBody>
-          <a:bodyPr wrap="square" rtlCol="0" anchor="ctr"/>
-          <a:lstStyle/>
-          <a:p>
-            <a:pPr marL="0" indent="0">
-              <a:buNone/>
-            </a:pPr>
-            <a:r>
-              <a:rPr lang="en-US" sz="1300" b="1" kern="0" spc="100" dirty="0">
-                <a:solidFill>
-                  <a:srgbClr val="1C7293"/>
-                </a:solidFill>
-                <a:latin typeface="微軟正黑體" panose="020B0604030504040204" pitchFamily="34" charset="-120"/>
-                <a:ea typeface="微軟正黑體" panose="020B0604030504040204" pitchFamily="34" charset="-120"/>
-                <a:cs typeface="Calibri" pitchFamily="34" charset="-120"/>
-              </a:rPr>
-              <a:t>JS CUSTOMIZATION</a:t>
-            </a:r>
-          </a:p>
-        </p:txBody>
-      </p:sp>
-      <p:sp>
-        <p:nvSpPr>
-          <p:cNvPr id="4" name="Text 2">
-            <a:extLst>
-              <a:ext uri="{FF2B5EF4-FFF2-40B4-BE49-F238E27FC236}">
-                <a16:creationId xmlns:a16="http://schemas.microsoft.com/office/drawing/2014/main" id="{B3FFBDC6-2E6A-8BDD-535D-23BE3CB8F275}"/>
-              </a:ext>
-            </a:extLst>
-          </p:cNvPr>
-          <p:cNvSpPr/>
-          <p:nvPr/>
-        </p:nvSpPr>
-        <p:spPr>
-          <a:xfrm>
-            <a:off x="1432408" y="722376"/>
-            <a:ext cx="9601200" cy="548640"/>
-          </a:xfrm>
-          <a:prstGeom prst="rect">
-            <a:avLst/>
-          </a:prstGeom>
-          <a:noFill/>
-          <a:ln/>
-        </p:spPr>
-        <p:txBody>
-          <a:bodyPr wrap="square" rtlCol="0" anchor="ctr"/>
-          <a:lstStyle/>
-          <a:p>
-            <a:pPr marL="0" indent="0">
-              <a:buNone/>
-            </a:pPr>
-            <a:r>
-              <a:rPr lang="zh-TW" altLang="en-US" sz="2800" b="1" dirty="0">
-                <a:solidFill>
-                  <a:srgbClr val="1E293B"/>
-                </a:solidFill>
-                <a:latin typeface="微軟正黑體" panose="020B0604030504040204" pitchFamily="34" charset="-120"/>
-                <a:ea typeface="微軟正黑體" panose="020B0604030504040204" pitchFamily="34" charset="-120"/>
-                <a:cs typeface="Cambria" pitchFamily="34" charset="-120"/>
-              </a:rPr>
-              <a:t>客製化 </a:t>
-            </a:r>
-            <a:r>
-              <a:rPr lang="en-US" altLang="zh-TW" sz="2800" b="1" dirty="0">
-                <a:solidFill>
-                  <a:srgbClr val="1E293B"/>
-                </a:solidFill>
-                <a:latin typeface="微軟正黑體" panose="020B0604030504040204" pitchFamily="34" charset="-120"/>
-                <a:ea typeface="微軟正黑體" panose="020B0604030504040204" pitchFamily="34" charset="-120"/>
-                <a:cs typeface="Cambria" pitchFamily="34" charset="-120"/>
-              </a:rPr>
-              <a:t>JS </a:t>
-            </a:r>
-            <a:r>
-              <a:rPr lang="zh-TW" altLang="en-US" sz="2800" b="1" dirty="0">
-                <a:solidFill>
-                  <a:srgbClr val="1E293B"/>
-                </a:solidFill>
-                <a:latin typeface="微軟正黑體" panose="020B0604030504040204" pitchFamily="34" charset="-120"/>
-                <a:ea typeface="微軟正黑體" panose="020B0604030504040204" pitchFamily="34" charset="-120"/>
-                <a:cs typeface="Cambria" pitchFamily="34" charset="-120"/>
-              </a:rPr>
-              <a:t>設定與上傳</a:t>
-            </a:r>
-          </a:p>
-        </p:txBody>
-      </p:sp>
-      <p:sp>
-        <p:nvSpPr>
           <p:cNvPr id="5" name="Text 3">
             <a:extLst>
               <a:ext uri="{FF2B5EF4-FFF2-40B4-BE49-F238E27FC236}">
@@ -22253,36 +21723,110 @@
           </a:p>
         </p:txBody>
       </p:sp>
-      <p:pic>
-        <p:nvPicPr>
-          <p:cNvPr id="7" name="Image 0" descr="preencoded.png">
-            <a:extLst>
-              <a:ext uri="{FF2B5EF4-FFF2-40B4-BE49-F238E27FC236}">
-                <a16:creationId xmlns:a16="http://schemas.microsoft.com/office/drawing/2014/main" id="{62D0B3E6-50EA-754F-1753-2DC06E0A320F}"/>
-              </a:ext>
-            </a:extLst>
-          </p:cNvPr>
-          <p:cNvPicPr>
-            <a:picLocks noChangeAspect="1"/>
-          </p:cNvPicPr>
-          <p:nvPr/>
-        </p:nvPicPr>
-        <p:blipFill>
-          <a:blip r:embed="rId2"/>
-          <a:stretch>
-            <a:fillRect/>
-          </a:stretch>
-        </p:blipFill>
-        <p:spPr>
-          <a:xfrm>
-            <a:off x="693524" y="656598"/>
-            <a:ext cx="420624" cy="420624"/>
-          </a:xfrm>
-          <a:prstGeom prst="rect">
-            <a:avLst/>
-          </a:prstGeom>
-        </p:spPr>
-      </p:pic>
+      <p:sp>
+        <p:nvSpPr>
+          <p:cNvPr id="13" name="Text 1">
+            <a:extLst>
+              <a:ext uri="{FF2B5EF4-FFF2-40B4-BE49-F238E27FC236}">
+                <a16:creationId xmlns:a16="http://schemas.microsoft.com/office/drawing/2014/main" id="{EDF57B0C-22CE-BC64-123D-7124DA54AAA2}"/>
+              </a:ext>
+            </a:extLst>
+          </p:cNvPr>
+          <p:cNvSpPr/>
+          <p:nvPr/>
+        </p:nvSpPr>
+        <p:spPr>
+          <a:xfrm>
+            <a:off x="792328" y="515112"/>
+            <a:ext cx="9784080" cy="320040"/>
+          </a:xfrm>
+          <a:prstGeom prst="rect">
+            <a:avLst/>
+          </a:prstGeom>
+          <a:noFill/>
+          <a:ln/>
+        </p:spPr>
+        <p:txBody>
+          <a:bodyPr wrap="square" rtlCol="0" anchor="ctr"/>
+          <a:lstStyle/>
+          <a:p>
+            <a:r>
+              <a:rPr lang="en-US" altLang="zh-TW" sz="1200" b="1" kern="0" spc="100" dirty="0">
+                <a:solidFill>
+                  <a:srgbClr val="1C7293"/>
+                </a:solidFill>
+                <a:latin typeface="微軟正黑體" panose="020B0604030504040204" pitchFamily="34" charset="-120"/>
+                <a:ea typeface="微軟正黑體" panose="020B0604030504040204" pitchFamily="34" charset="-120"/>
+                <a:cs typeface="Calibri" pitchFamily="34" charset="-120"/>
+              </a:rPr>
+              <a:t>JS CUSTOMIZATION</a:t>
+            </a:r>
+          </a:p>
+        </p:txBody>
+      </p:sp>
+      <p:sp>
+        <p:nvSpPr>
+          <p:cNvPr id="15" name="Text 2">
+            <a:extLst>
+              <a:ext uri="{FF2B5EF4-FFF2-40B4-BE49-F238E27FC236}">
+                <a16:creationId xmlns:a16="http://schemas.microsoft.com/office/drawing/2014/main" id="{278DC195-4524-3A8B-519D-85D9DC5B2598}"/>
+              </a:ext>
+            </a:extLst>
+          </p:cNvPr>
+          <p:cNvSpPr/>
+          <p:nvPr/>
+        </p:nvSpPr>
+        <p:spPr>
+          <a:xfrm>
+            <a:off x="792328" y="823976"/>
+            <a:ext cx="10241280" cy="548640"/>
+          </a:xfrm>
+          <a:prstGeom prst="rect">
+            <a:avLst/>
+          </a:prstGeom>
+          <a:noFill/>
+          <a:ln/>
+        </p:spPr>
+        <p:txBody>
+          <a:bodyPr wrap="square" rtlCol="0" anchor="ctr"/>
+          <a:lstStyle/>
+          <a:p>
+            <a:r>
+              <a:rPr lang="zh-TW" altLang="en-US" sz="2800" b="1" dirty="0">
+                <a:solidFill>
+                  <a:srgbClr val="1E293B"/>
+                </a:solidFill>
+                <a:latin typeface="微軟正黑體" panose="020B0604030504040204" pitchFamily="34" charset="-120"/>
+                <a:ea typeface="微軟正黑體" panose="020B0604030504040204" pitchFamily="34" charset="-120"/>
+                <a:cs typeface="Cambria" pitchFamily="34" charset="-120"/>
+              </a:rPr>
+              <a:t>客製化 </a:t>
+            </a:r>
+            <a:r>
+              <a:rPr lang="en-US" altLang="zh-TW" sz="2800" b="1" dirty="0">
+                <a:solidFill>
+                  <a:srgbClr val="1E293B"/>
+                </a:solidFill>
+                <a:latin typeface="微軟正黑體" panose="020B0604030504040204" pitchFamily="34" charset="-120"/>
+                <a:ea typeface="微軟正黑體" panose="020B0604030504040204" pitchFamily="34" charset="-120"/>
+                <a:cs typeface="Cambria" pitchFamily="34" charset="-120"/>
+              </a:rPr>
+              <a:t>JS </a:t>
+            </a:r>
+            <a:r>
+              <a:rPr lang="zh-TW" altLang="en-US" sz="2800" b="1" dirty="0">
+                <a:solidFill>
+                  <a:srgbClr val="1E293B"/>
+                </a:solidFill>
+                <a:latin typeface="微軟正黑體" panose="020B0604030504040204" pitchFamily="34" charset="-120"/>
+                <a:ea typeface="微軟正黑體" panose="020B0604030504040204" pitchFamily="34" charset="-120"/>
+                <a:cs typeface="Cambria" pitchFamily="34" charset="-120"/>
+              </a:rPr>
+              <a:t>設定與上傳</a:t>
+            </a:r>
+          </a:p>
+        </p:txBody>
+      </p:sp>
     </p:spTree>
     <p:extLst>
       <p:ext uri="{BB962C8B-B14F-4D97-AF65-F5344CB8AC3E}">
@@ -22345,113 +21889,6 @@
       </p:sp>
       <p:sp>
         <p:nvSpPr>
-          <p:cNvPr id="3" name="Text 1">
-            <a:extLst>
-              <a:ext uri="{FF2B5EF4-FFF2-40B4-BE49-F238E27FC236}">
-                <a16:creationId xmlns:a16="http://schemas.microsoft.com/office/drawing/2014/main" id="{BDC7FB9A-3B2C-96DB-AE1D-00EC2FBE3722}"/>
-              </a:ext>
-            </a:extLst>
-          </p:cNvPr>
-          <p:cNvSpPr/>
-          <p:nvPr/>
-        </p:nvSpPr>
-        <p:spPr>
-          <a:xfrm>
-            <a:off x="1432408" y="438912"/>
-            <a:ext cx="9144000" cy="320040"/>
-          </a:xfrm>
-          <a:prstGeom prst="rect">
-            <a:avLst/>
-          </a:prstGeom>
-          <a:noFill/>
-          <a:ln/>
-        </p:spPr>
-        <p:txBody>
-          <a:bodyPr wrap="square" rtlCol="0" anchor="ctr"/>
-          <a:lstStyle/>
-          <a:p>
-            <a:pPr marL="0" indent="0">
-              <a:buNone/>
-            </a:pPr>
-            <a:r>
-              <a:rPr lang="en-US" altLang="zh-TW" sz="1300" b="1" kern="0" spc="100" dirty="0">
-                <a:solidFill>
-                  <a:srgbClr val="1C7293"/>
-                </a:solidFill>
-                <a:latin typeface="微軟正黑體" panose="020B0604030504040204" pitchFamily="34" charset="-120"/>
-                <a:ea typeface="微軟正黑體" panose="020B0604030504040204" pitchFamily="34" charset="-120"/>
-                <a:cs typeface="Calibri" pitchFamily="34" charset="-120"/>
-              </a:rPr>
-              <a:t>INVENTORY</a:t>
-            </a:r>
-            <a:endParaRPr lang="en-US" sz="1300" b="1" kern="0" spc="100" dirty="0">
-              <a:solidFill>
-                <a:srgbClr val="1C7293"/>
-              </a:solidFill>
-              <a:latin typeface="微軟正黑體" panose="020B0604030504040204" pitchFamily="34" charset="-120"/>
-              <a:ea typeface="微軟正黑體" panose="020B0604030504040204" pitchFamily="34" charset="-120"/>
-              <a:cs typeface="Calibri" pitchFamily="34" charset="-120"/>
-            </a:endParaRPr>
-          </a:p>
-        </p:txBody>
-      </p:sp>
-      <p:sp>
-        <p:nvSpPr>
-          <p:cNvPr id="4" name="Text 2">
-            <a:extLst>
-              <a:ext uri="{FF2B5EF4-FFF2-40B4-BE49-F238E27FC236}">
-                <a16:creationId xmlns:a16="http://schemas.microsoft.com/office/drawing/2014/main" id="{AFAC489A-3BCD-021C-43D3-053B975278D1}"/>
-              </a:ext>
-            </a:extLst>
-          </p:cNvPr>
-          <p:cNvSpPr/>
-          <p:nvPr/>
-        </p:nvSpPr>
-        <p:spPr>
-          <a:xfrm>
-            <a:off x="1432408" y="722376"/>
-            <a:ext cx="9601200" cy="548640"/>
-          </a:xfrm>
-          <a:prstGeom prst="rect">
-            <a:avLst/>
-          </a:prstGeom>
-          <a:noFill/>
-          <a:ln/>
-        </p:spPr>
-        <p:txBody>
-          <a:bodyPr wrap="square" rtlCol="0" anchor="ctr"/>
-          <a:lstStyle/>
-          <a:p>
-            <a:pPr marL="0" indent="0">
-              <a:buNone/>
-            </a:pPr>
-            <a:r>
-              <a:rPr lang="en-US" altLang="zh-TW" sz="2800" b="1" dirty="0">
-                <a:solidFill>
-                  <a:srgbClr val="1E293B"/>
-                </a:solidFill>
-                <a:latin typeface="微軟正黑體" panose="020B0604030504040204" pitchFamily="34" charset="-120"/>
-                <a:ea typeface="微軟正黑體" panose="020B0604030504040204" pitchFamily="34" charset="-120"/>
-                <a:cs typeface="Cambria" pitchFamily="34" charset="-120"/>
-              </a:rPr>
-              <a:t>1-1 </a:t>
-            </a:r>
-            <a:r>
-              <a:rPr lang="zh-TW" altLang="en-US" sz="2800" b="1" dirty="0">
-                <a:solidFill>
-                  <a:srgbClr val="1E293B"/>
-                </a:solidFill>
-                <a:latin typeface="微軟正黑體" panose="020B0604030504040204" pitchFamily="34" charset="-120"/>
-                <a:ea typeface="微軟正黑體" panose="020B0604030504040204" pitchFamily="34" charset="-120"/>
-                <a:cs typeface="Cambria" pitchFamily="34" charset="-120"/>
-              </a:rPr>
-              <a:t>庫存總表</a:t>
-            </a:r>
-          </a:p>
-        </p:txBody>
-      </p:sp>
-      <p:sp>
-        <p:nvSpPr>
           <p:cNvPr id="5" name="Text 3">
             <a:extLst>
               <a:ext uri="{FF2B5EF4-FFF2-40B4-BE49-F238E27FC236}">
@@ -23456,36 +22893,99 @@
           </a:p>
         </p:txBody>
       </p:sp>
-      <p:pic>
-        <p:nvPicPr>
-          <p:cNvPr id="20" name="Image 0" descr="preencoded.png">
-            <a:extLst>
-              <a:ext uri="{FF2B5EF4-FFF2-40B4-BE49-F238E27FC236}">
-                <a16:creationId xmlns:a16="http://schemas.microsoft.com/office/drawing/2014/main" id="{2130C0AB-A243-B162-3A90-7564D85895C6}"/>
-              </a:ext>
-            </a:extLst>
-          </p:cNvPr>
-          <p:cNvPicPr>
-            <a:picLocks noChangeAspect="1"/>
-          </p:cNvPicPr>
-          <p:nvPr/>
-        </p:nvPicPr>
-        <p:blipFill>
-          <a:blip r:embed="rId2"/>
-          <a:stretch>
-            <a:fillRect/>
-          </a:stretch>
-        </p:blipFill>
-        <p:spPr>
-          <a:xfrm>
-            <a:off x="710337" y="639493"/>
-            <a:ext cx="425933" cy="425933"/>
-          </a:xfrm>
-          <a:prstGeom prst="rect">
-            <a:avLst/>
-          </a:prstGeom>
-        </p:spPr>
-      </p:pic>
+      <p:sp>
+        <p:nvSpPr>
+          <p:cNvPr id="19" name="Text 1">
+            <a:extLst>
+              <a:ext uri="{FF2B5EF4-FFF2-40B4-BE49-F238E27FC236}">
+                <a16:creationId xmlns:a16="http://schemas.microsoft.com/office/drawing/2014/main" id="{0D1F3A83-D82B-D7A4-4F39-B12B1ACDC6C3}"/>
+              </a:ext>
+            </a:extLst>
+          </p:cNvPr>
+          <p:cNvSpPr/>
+          <p:nvPr/>
+        </p:nvSpPr>
+        <p:spPr>
+          <a:xfrm>
+            <a:off x="792328" y="515112"/>
+            <a:ext cx="9784080" cy="320040"/>
+          </a:xfrm>
+          <a:prstGeom prst="rect">
+            <a:avLst/>
+          </a:prstGeom>
+          <a:noFill/>
+          <a:ln/>
+        </p:spPr>
+        <p:txBody>
+          <a:bodyPr wrap="square" rtlCol="0" anchor="ctr"/>
+          <a:lstStyle/>
+          <a:p>
+            <a:r>
+              <a:rPr lang="en-US" altLang="zh-TW" sz="1200" b="1" kern="0" spc="100" dirty="0">
+                <a:solidFill>
+                  <a:srgbClr val="1C7293"/>
+                </a:solidFill>
+                <a:latin typeface="微軟正黑體" panose="020B0604030504040204" pitchFamily="34" charset="-120"/>
+                <a:ea typeface="微軟正黑體" panose="020B0604030504040204" pitchFamily="34" charset="-120"/>
+                <a:cs typeface="Calibri" pitchFamily="34" charset="-120"/>
+              </a:rPr>
+              <a:t>INVENTORY</a:t>
+            </a:r>
+          </a:p>
+        </p:txBody>
+      </p:sp>
+      <p:sp>
+        <p:nvSpPr>
+          <p:cNvPr id="22" name="Text 2">
+            <a:extLst>
+              <a:ext uri="{FF2B5EF4-FFF2-40B4-BE49-F238E27FC236}">
+                <a16:creationId xmlns:a16="http://schemas.microsoft.com/office/drawing/2014/main" id="{F2D5BFCE-C42B-8465-CF0F-28225D6BA46B}"/>
+              </a:ext>
+            </a:extLst>
+          </p:cNvPr>
+          <p:cNvSpPr/>
+          <p:nvPr/>
+        </p:nvSpPr>
+        <p:spPr>
+          <a:xfrm>
+            <a:off x="792328" y="823976"/>
+            <a:ext cx="10241280" cy="548640"/>
+          </a:xfrm>
+          <a:prstGeom prst="rect">
+            <a:avLst/>
+          </a:prstGeom>
+          <a:noFill/>
+          <a:ln/>
+        </p:spPr>
+        <p:txBody>
+          <a:bodyPr wrap="square" rtlCol="0" anchor="ctr"/>
+          <a:lstStyle/>
+          <a:p>
+            <a:r>
+              <a:rPr lang="en-US" altLang="zh-TW" sz="2800" b="1" dirty="0">
+                <a:solidFill>
+                  <a:srgbClr val="1E293B"/>
+                </a:solidFill>
+                <a:latin typeface="微軟正黑體" panose="020B0604030504040204" pitchFamily="34" charset="-120"/>
+                <a:ea typeface="微軟正黑體" panose="020B0604030504040204" pitchFamily="34" charset="-120"/>
+                <a:cs typeface="Cambria" pitchFamily="34" charset="-120"/>
+              </a:rPr>
+              <a:t>1-1 </a:t>
+            </a:r>
+            <a:r>
+              <a:rPr lang="zh-TW" altLang="en-US" sz="2800" b="1" dirty="0">
+                <a:solidFill>
+                  <a:srgbClr val="1E293B"/>
+                </a:solidFill>
+                <a:latin typeface="微軟正黑體" panose="020B0604030504040204" pitchFamily="34" charset="-120"/>
+                <a:ea typeface="微軟正黑體" panose="020B0604030504040204" pitchFamily="34" charset="-120"/>
+                <a:cs typeface="Cambria" pitchFamily="34" charset="-120"/>
+              </a:rPr>
+              <a:t>庫存總表</a:t>
+            </a:r>
+          </a:p>
+        </p:txBody>
+      </p:sp>
     </p:spTree>
     <p:extLst>
       <p:ext uri="{BB962C8B-B14F-4D97-AF65-F5344CB8AC3E}">
